--- a/Vietnam-Airlines-Bangladesh-Operations-Launch-Plan.pptx
+++ b/Vietnam-Airlines-Bangladesh-Operations-Launch-Plan.pptx
@@ -3119,7 +3119,7 @@
             <a:avLst/>
           </a:prstGeom>
           <a:solidFill>
-            <a:srgbClr val="0A4B49"/>
+            <a:srgbClr val="0A5F65"/>
           </a:solidFill>
           <a:ln>
             <a:noFill/>
@@ -3229,7 +3229,7 @@
             <a:r>
               <a:rPr sz="1050" b="0" cap="all" spc="260">
                 <a:solidFill>
-                  <a:srgbClr val="ED9D67"/>
+                  <a:srgbClr val="FFD264"/>
                 </a:solidFill>
                 <a:latin typeface="IBM Plex Mono"/>
               </a:rPr>
@@ -3280,7 +3280,7 @@
             <a:r>
               <a:rPr sz="4000" b="1">
                 <a:solidFill>
-                  <a:srgbClr val="E8823D"/>
+                  <a:srgbClr val="FFD264"/>
                 </a:solidFill>
                 <a:latin typeface="Outfit"/>
               </a:rPr>
@@ -3341,7 +3341,7 @@
             <a:r>
               <a:rPr sz="1050" b="0" i="1">
                 <a:solidFill>
-                  <a:srgbClr val="D3E8E6"/>
+                  <a:srgbClr val="DCF2F3"/>
                 </a:solidFill>
                 <a:latin typeface="Plus Jakarta Sans"/>
               </a:rPr>
@@ -3365,7 +3365,7 @@
             <a:avLst/>
           </a:prstGeom>
           <a:solidFill>
-            <a:srgbClr val="13807C"/>
+            <a:srgbClr val="0C7A80"/>
           </a:solidFill>
           <a:ln>
             <a:noFill/>
@@ -3396,7 +3396,7 @@
       </p:sp>
       <p:pic>
         <p:nvPicPr>
-          <p:cNvPr id="9" name="Picture 8" descr="his_icon1.png"/>
+          <p:cNvPr id="9" name="Picture 8" descr="fp_icon1.png"/>
           <p:cNvPicPr>
             <a:picLocks noChangeAspect="1"/>
           </p:cNvPicPr>
@@ -3451,7 +3451,7 @@
             <a:r>
               <a:rPr sz="750" b="0" cap="all" spc="130">
                 <a:solidFill>
-                  <a:srgbClr val="D3E8E6"/>
+                  <a:srgbClr val="DCF2F3"/>
                 </a:solidFill>
                 <a:latin typeface="IBM Plex Mono"/>
               </a:rPr>
@@ -3475,7 +3475,7 @@
             <a:avLst/>
           </a:prstGeom>
           <a:solidFill>
-            <a:srgbClr val="13807C"/>
+            <a:srgbClr val="0C7A80"/>
           </a:solidFill>
           <a:ln>
             <a:noFill/>
@@ -3506,7 +3506,7 @@
       </p:sp>
       <p:pic>
         <p:nvPicPr>
-          <p:cNvPr id="12" name="Picture 11" descr="his_icon2.png"/>
+          <p:cNvPr id="12" name="Picture 11" descr="fp_icon2.png"/>
           <p:cNvPicPr>
             <a:picLocks noChangeAspect="1"/>
           </p:cNvPicPr>
@@ -3561,7 +3561,7 @@
             <a:r>
               <a:rPr sz="750" b="0" cap="all" spc="130">
                 <a:solidFill>
-                  <a:srgbClr val="D3E8E6"/>
+                  <a:srgbClr val="DCF2F3"/>
                 </a:solidFill>
                 <a:latin typeface="IBM Plex Mono"/>
               </a:rPr>
@@ -3585,7 +3585,7 @@
             <a:avLst/>
           </a:prstGeom>
           <a:solidFill>
-            <a:srgbClr val="13807C"/>
+            <a:srgbClr val="0C7A80"/>
           </a:solidFill>
           <a:ln>
             <a:noFill/>
@@ -3616,7 +3616,7 @@
       </p:sp>
       <p:pic>
         <p:nvPicPr>
-          <p:cNvPr id="15" name="Picture 14" descr="his_icon3.png"/>
+          <p:cNvPr id="15" name="Picture 14" descr="fp_icon3.png"/>
           <p:cNvPicPr>
             <a:picLocks noChangeAspect="1"/>
           </p:cNvPicPr>
@@ -3671,7 +3671,7 @@
             <a:r>
               <a:rPr sz="750" b="0" cap="all" spc="130">
                 <a:solidFill>
-                  <a:srgbClr val="D3E8E6"/>
+                  <a:srgbClr val="DCF2F3"/>
                 </a:solidFill>
                 <a:latin typeface="IBM Plex Mono"/>
               </a:rPr>
@@ -3695,7 +3695,7 @@
             <a:avLst/>
           </a:prstGeom>
           <a:solidFill>
-            <a:srgbClr val="13807C"/>
+            <a:srgbClr val="0C7A80"/>
           </a:solidFill>
           <a:ln>
             <a:noFill/>
@@ -3726,7 +3726,7 @@
       </p:sp>
       <p:pic>
         <p:nvPicPr>
-          <p:cNvPr id="18" name="Picture 17" descr="his_icon4.png"/>
+          <p:cNvPr id="18" name="Picture 17" descr="fp_icon4.png"/>
           <p:cNvPicPr>
             <a:picLocks noChangeAspect="1"/>
           </p:cNvPicPr>
@@ -3781,7 +3781,7 @@
             <a:r>
               <a:rPr sz="750" b="0" cap="all" spc="130">
                 <a:solidFill>
-                  <a:srgbClr val="D3E8E6"/>
+                  <a:srgbClr val="DCF2F3"/>
                 </a:solidFill>
                 <a:latin typeface="IBM Plex Mono"/>
               </a:rPr>
@@ -3791,7 +3791,7 @@
             <a:r>
               <a:rPr sz="750" b="0" cap="all" spc="130">
                 <a:solidFill>
-                  <a:srgbClr val="D3E8E6"/>
+                  <a:srgbClr val="DCF2F3"/>
                 </a:solidFill>
                 <a:latin typeface="IBM Plex Mono"/>
               </a:rPr>
@@ -3815,7 +3815,7 @@
             <a:avLst/>
           </a:prstGeom>
           <a:solidFill>
-            <a:srgbClr val="13807C"/>
+            <a:srgbClr val="0C7A80"/>
           </a:solidFill>
           <a:ln>
             <a:noFill/>
@@ -3846,7 +3846,7 @@
       </p:sp>
       <p:pic>
         <p:nvPicPr>
-          <p:cNvPr id="21" name="Picture 20" descr="his_icon5.png"/>
+          <p:cNvPr id="21" name="Picture 20" descr="fp_icon5.png"/>
           <p:cNvPicPr>
             <a:picLocks noChangeAspect="1"/>
           </p:cNvPicPr>
@@ -3901,7 +3901,7 @@
             <a:r>
               <a:rPr sz="750" b="0" cap="all" spc="130">
                 <a:solidFill>
-                  <a:srgbClr val="D3E8E6"/>
+                  <a:srgbClr val="DCF2F3"/>
                 </a:solidFill>
                 <a:latin typeface="IBM Plex Mono"/>
               </a:rPr>
@@ -3925,7 +3925,7 @@
             <a:avLst/>
           </a:prstGeom>
           <a:solidFill>
-            <a:srgbClr val="13807C"/>
+            <a:srgbClr val="0C7A80"/>
           </a:solidFill>
           <a:ln>
             <a:noFill/>
@@ -3956,7 +3956,7 @@
       </p:sp>
       <p:pic>
         <p:nvPicPr>
-          <p:cNvPr id="24" name="Picture 23" descr="his_icon6.png"/>
+          <p:cNvPr id="24" name="Picture 23" descr="fp_icon6.png"/>
           <p:cNvPicPr>
             <a:picLocks noChangeAspect="1"/>
           </p:cNvPicPr>
@@ -4011,7 +4011,7 @@
             <a:r>
               <a:rPr sz="750" b="0" cap="all" spc="130">
                 <a:solidFill>
-                  <a:srgbClr val="D3E8E6"/>
+                  <a:srgbClr val="DCF2F3"/>
                 </a:solidFill>
                 <a:latin typeface="IBM Plex Mono"/>
               </a:rPr>
@@ -4035,7 +4035,7 @@
             <a:avLst/>
           </a:prstGeom>
           <a:solidFill>
-            <a:srgbClr val="2E7E7A"/>
+            <a:srgbClr val="2E8A90"/>
           </a:solidFill>
           <a:ln>
             <a:noFill/>
@@ -4121,7 +4121,7 @@
             <a:r>
               <a:rPr sz="800" b="0" cap="all" spc="180">
                 <a:solidFill>
-                  <a:srgbClr val="9DC4C1"/>
+                  <a:srgbClr val="A9D6D9"/>
                 </a:solidFill>
                 <a:latin typeface="IBM Plex Mono"/>
               </a:rPr>
@@ -4211,7 +4211,7 @@
             <a:r>
               <a:rPr sz="750" b="0" cap="all" spc="160">
                 <a:solidFill>
-                  <a:srgbClr val="9DC4C1"/>
+                  <a:srgbClr val="A9D6D9"/>
                 </a:solidFill>
                 <a:latin typeface="IBM Plex Mono"/>
               </a:rPr>
@@ -4253,7 +4253,7 @@
             <a:r>
               <a:rPr sz="900" b="0">
                 <a:solidFill>
-                  <a:srgbClr val="8FA6A4"/>
+                  <a:srgbClr val="A9D6D9"/>
                 </a:solidFill>
                 <a:latin typeface="IBM Plex Mono"/>
               </a:rPr>
@@ -4295,7 +4295,7 @@
             <a:avLst/>
           </a:prstGeom>
           <a:solidFill>
-            <a:srgbClr val="FFFFFF"/>
+            <a:srgbClr val="FBFDFE"/>
           </a:solidFill>
           <a:ln>
             <a:noFill/>
@@ -4357,7 +4357,7 @@
             <a:r>
               <a:rPr sz="1000" b="0" cap="all" spc="240">
                 <a:solidFill>
-                  <a:srgbClr val="B55615"/>
+                  <a:srgbClr val="8A6608"/>
                 </a:solidFill>
                 <a:latin typeface="IBM Plex Mono"/>
               </a:rPr>
@@ -4399,7 +4399,7 @@
             <a:r>
               <a:rPr sz="2900" b="1">
                 <a:solidFill>
-                  <a:srgbClr val="17302E"/>
+                  <a:srgbClr val="0E2830"/>
                 </a:solidFill>
                 <a:latin typeface="Outfit"/>
               </a:rPr>
@@ -4425,11 +4425,11 @@
             </a:avLst>
           </a:prstGeom>
           <a:solidFill>
-            <a:srgbClr val="F2F8F7"/>
+            <a:srgbClr val="F0F7F8"/>
           </a:solidFill>
           <a:ln w="12700">
             <a:solidFill>
-              <a:srgbClr val="DCEAE8"/>
+              <a:srgbClr val="DCEAED"/>
             </a:solidFill>
           </a:ln>
           <a:effectLst/>
@@ -4489,7 +4489,7 @@
             <a:r>
               <a:rPr sz="800" b="0" cap="all" spc="180">
                 <a:solidFill>
-                  <a:srgbClr val="5D7573"/>
+                  <a:srgbClr val="52737D"/>
                 </a:solidFill>
                 <a:latin typeface="IBM Plex Mono"/>
               </a:rPr>
@@ -4531,7 +4531,7 @@
             <a:r>
               <a:rPr sz="1200" b="1">
                 <a:solidFill>
-                  <a:srgbClr val="17302E"/>
+                  <a:srgbClr val="0E2830"/>
                 </a:solidFill>
                 <a:latin typeface="Outfit"/>
               </a:rPr>
@@ -4555,7 +4555,7 @@
             <a:avLst/>
           </a:prstGeom>
           <a:solidFill>
-            <a:srgbClr val="0E6B68"/>
+            <a:srgbClr val="E9B949"/>
           </a:solidFill>
           <a:ln>
             <a:noFill/>
@@ -4617,7 +4617,7 @@
             <a:r>
               <a:rPr sz="919" b="0">
                 <a:solidFill>
-                  <a:srgbClr val="5A7674"/>
+                  <a:srgbClr val="33555F"/>
                 </a:solidFill>
                 <a:latin typeface="Plus Jakarta Sans"/>
               </a:rPr>
@@ -4641,7 +4641,7 @@
             <a:avLst/>
           </a:prstGeom>
           <a:solidFill>
-            <a:srgbClr val="0E6B68"/>
+            <a:srgbClr val="E9B949"/>
           </a:solidFill>
           <a:ln>
             <a:noFill/>
@@ -4703,7 +4703,7 @@
             <a:r>
               <a:rPr sz="919" b="0">
                 <a:solidFill>
-                  <a:srgbClr val="5A7674"/>
+                  <a:srgbClr val="33555F"/>
                 </a:solidFill>
                 <a:latin typeface="Plus Jakarta Sans"/>
               </a:rPr>
@@ -4727,7 +4727,7 @@
             <a:avLst/>
           </a:prstGeom>
           <a:solidFill>
-            <a:srgbClr val="0E6B68"/>
+            <a:srgbClr val="E9B949"/>
           </a:solidFill>
           <a:ln>
             <a:noFill/>
@@ -4789,7 +4789,7 @@
             <a:r>
               <a:rPr sz="919" b="0">
                 <a:solidFill>
-                  <a:srgbClr val="5A7674"/>
+                  <a:srgbClr val="33555F"/>
                 </a:solidFill>
                 <a:latin typeface="Plus Jakarta Sans"/>
               </a:rPr>
@@ -4813,7 +4813,7 @@
             <a:avLst/>
           </a:prstGeom>
           <a:solidFill>
-            <a:srgbClr val="0E6B68"/>
+            <a:srgbClr val="E9B949"/>
           </a:solidFill>
           <a:ln>
             <a:noFill/>
@@ -4875,7 +4875,7 @@
             <a:r>
               <a:rPr sz="919" b="0">
                 <a:solidFill>
-                  <a:srgbClr val="5A7674"/>
+                  <a:srgbClr val="33555F"/>
                 </a:solidFill>
                 <a:latin typeface="Plus Jakarta Sans"/>
               </a:rPr>
@@ -4899,7 +4899,7 @@
             <a:avLst/>
           </a:prstGeom>
           <a:solidFill>
-            <a:srgbClr val="0E6B68"/>
+            <a:srgbClr val="E9B949"/>
           </a:solidFill>
           <a:ln>
             <a:noFill/>
@@ -4961,7 +4961,7 @@
             <a:r>
               <a:rPr sz="919" b="0">
                 <a:solidFill>
-                  <a:srgbClr val="5A7674"/>
+                  <a:srgbClr val="33555F"/>
                 </a:solidFill>
                 <a:latin typeface="Plus Jakarta Sans"/>
               </a:rPr>
@@ -4987,11 +4987,11 @@
             </a:avLst>
           </a:prstGeom>
           <a:solidFill>
-            <a:srgbClr val="FBDCE6"/>
+            <a:srgbClr val="FCE2F0"/>
           </a:solidFill>
           <a:ln w="12700">
             <a:solidFill>
-              <a:srgbClr val="E85C82"/>
+              <a:srgbClr val="F49CCB"/>
             </a:solidFill>
           </a:ln>
           <a:effectLst/>
@@ -5051,7 +5051,7 @@
             <a:r>
               <a:rPr sz="800" b="0" cap="all" spc="180">
                 <a:solidFill>
-                  <a:srgbClr val="C11B48"/>
+                  <a:srgbClr val="C10073"/>
                 </a:solidFill>
                 <a:latin typeface="IBM Plex Mono"/>
               </a:rPr>
@@ -5093,7 +5093,7 @@
             <a:r>
               <a:rPr sz="1200" b="1">
                 <a:solidFill>
-                  <a:srgbClr val="17302E"/>
+                  <a:srgbClr val="0E2830"/>
                 </a:solidFill>
                 <a:latin typeface="Outfit"/>
               </a:rPr>
@@ -5117,7 +5117,7 @@
             <a:avLst/>
           </a:prstGeom>
           <a:solidFill>
-            <a:srgbClr val="E85C82"/>
+            <a:srgbClr val="EC008C"/>
           </a:solidFill>
           <a:ln>
             <a:noFill/>
@@ -5179,7 +5179,7 @@
             <a:r>
               <a:rPr sz="919" b="0">
                 <a:solidFill>
-                  <a:srgbClr val="17302E"/>
+                  <a:srgbClr val="33555F"/>
                 </a:solidFill>
                 <a:latin typeface="Plus Jakarta Sans"/>
               </a:rPr>
@@ -5203,7 +5203,7 @@
             <a:avLst/>
           </a:prstGeom>
           <a:solidFill>
-            <a:srgbClr val="E85C82"/>
+            <a:srgbClr val="EC008C"/>
           </a:solidFill>
           <a:ln>
             <a:noFill/>
@@ -5265,7 +5265,7 @@
             <a:r>
               <a:rPr sz="919" b="0">
                 <a:solidFill>
-                  <a:srgbClr val="17302E"/>
+                  <a:srgbClr val="33555F"/>
                 </a:solidFill>
                 <a:latin typeface="Plus Jakarta Sans"/>
               </a:rPr>
@@ -5289,7 +5289,7 @@
             <a:avLst/>
           </a:prstGeom>
           <a:solidFill>
-            <a:srgbClr val="E85C82"/>
+            <a:srgbClr val="EC008C"/>
           </a:solidFill>
           <a:ln>
             <a:noFill/>
@@ -5351,7 +5351,7 @@
             <a:r>
               <a:rPr sz="919" b="0">
                 <a:solidFill>
-                  <a:srgbClr val="17302E"/>
+                  <a:srgbClr val="33555F"/>
                 </a:solidFill>
                 <a:latin typeface="Plus Jakarta Sans"/>
               </a:rPr>
@@ -5375,7 +5375,7 @@
             <a:avLst/>
           </a:prstGeom>
           <a:solidFill>
-            <a:srgbClr val="E85C82"/>
+            <a:srgbClr val="EC008C"/>
           </a:solidFill>
           <a:ln>
             <a:noFill/>
@@ -5437,7 +5437,7 @@
             <a:r>
               <a:rPr sz="919" b="0">
                 <a:solidFill>
-                  <a:srgbClr val="17302E"/>
+                  <a:srgbClr val="33555F"/>
                 </a:solidFill>
                 <a:latin typeface="Plus Jakarta Sans"/>
               </a:rPr>
@@ -5461,7 +5461,7 @@
             <a:avLst/>
           </a:prstGeom>
           <a:solidFill>
-            <a:srgbClr val="E85C82"/>
+            <a:srgbClr val="EC008C"/>
           </a:solidFill>
           <a:ln>
             <a:noFill/>
@@ -5523,7 +5523,7 @@
             <a:r>
               <a:rPr sz="919" b="0">
                 <a:solidFill>
-                  <a:srgbClr val="17302E"/>
+                  <a:srgbClr val="33555F"/>
                 </a:solidFill>
                 <a:latin typeface="Plus Jakarta Sans"/>
               </a:rPr>
@@ -5565,7 +5565,7 @@
             <a:r>
               <a:rPr sz="700" b="0" cap="all" spc="140">
                 <a:solidFill>
-                  <a:srgbClr val="8FA6A4"/>
+                  <a:srgbClr val="52737D"/>
                 </a:solidFill>
                 <a:latin typeface="IBM Plex Mono"/>
               </a:rPr>
@@ -5607,7 +5607,7 @@
             <a:r>
               <a:rPr sz="900" b="0">
                 <a:solidFill>
-                  <a:srgbClr val="8FA6A4"/>
+                  <a:srgbClr val="52737D"/>
                 </a:solidFill>
                 <a:latin typeface="IBM Plex Mono"/>
               </a:rPr>
@@ -5649,7 +5649,7 @@
             <a:avLst/>
           </a:prstGeom>
           <a:solidFill>
-            <a:srgbClr val="FFFFFF"/>
+            <a:srgbClr val="FBFDFE"/>
           </a:solidFill>
           <a:ln>
             <a:noFill/>
@@ -5711,7 +5711,7 @@
             <a:r>
               <a:rPr sz="1000" b="0" cap="all" spc="240">
                 <a:solidFill>
-                  <a:srgbClr val="B55615"/>
+                  <a:srgbClr val="8A6608"/>
                 </a:solidFill>
                 <a:latin typeface="IBM Plex Mono"/>
               </a:rPr>
@@ -5753,7 +5753,7 @@
             <a:r>
               <a:rPr sz="3000" b="1">
                 <a:solidFill>
-                  <a:srgbClr val="17302E"/>
+                  <a:srgbClr val="0E2830"/>
                 </a:solidFill>
                 <a:latin typeface="Outfit"/>
               </a:rPr>
@@ -5795,7 +5795,7 @@
             <a:r>
               <a:rPr sz="1200" b="0">
                 <a:solidFill>
-                  <a:srgbClr val="5A7674"/>
+                  <a:srgbClr val="52737D"/>
                 </a:solidFill>
                 <a:latin typeface="Plus Jakarta Sans"/>
               </a:rPr>
@@ -5821,11 +5821,11 @@
             </a:avLst>
           </a:prstGeom>
           <a:solidFill>
-            <a:srgbClr val="F2F8F7"/>
+            <a:srgbClr val="F0F7F8"/>
           </a:solidFill>
           <a:ln w="12700">
             <a:solidFill>
-              <a:srgbClr val="DCEAE8"/>
+              <a:srgbClr val="DCEAED"/>
             </a:solidFill>
           </a:ln>
           <a:effectLst/>
@@ -5885,7 +5885,7 @@
             <a:r>
               <a:rPr sz="1500" b="1">
                 <a:solidFill>
-                  <a:srgbClr val="B55615"/>
+                  <a:srgbClr val="8A6608"/>
                 </a:solidFill>
                 <a:latin typeface="Outfit"/>
               </a:rPr>
@@ -5904,7 +5904,7 @@
             <a:r>
               <a:rPr sz="950" b="1">
                 <a:solidFill>
-                  <a:srgbClr val="17302E"/>
+                  <a:srgbClr val="0E2830"/>
                 </a:solidFill>
                 <a:latin typeface="Outfit"/>
               </a:rPr>
@@ -5923,7 +5923,7 @@
             <a:r>
               <a:rPr sz="819" b="0">
                 <a:solidFill>
-                  <a:srgbClr val="5A7674"/>
+                  <a:srgbClr val="33555F"/>
                 </a:solidFill>
                 <a:latin typeface="Plus Jakarta Sans"/>
               </a:rPr>
@@ -5949,11 +5949,11 @@
             </a:avLst>
           </a:prstGeom>
           <a:solidFill>
-            <a:srgbClr val="F2F8F7"/>
+            <a:srgbClr val="F0F7F8"/>
           </a:solidFill>
           <a:ln w="12700">
             <a:solidFill>
-              <a:srgbClr val="DCEAE8"/>
+              <a:srgbClr val="DCEAED"/>
             </a:solidFill>
           </a:ln>
           <a:effectLst/>
@@ -6013,7 +6013,7 @@
             <a:r>
               <a:rPr sz="1500" b="1">
                 <a:solidFill>
-                  <a:srgbClr val="B55615"/>
+                  <a:srgbClr val="8A6608"/>
                 </a:solidFill>
                 <a:latin typeface="Outfit"/>
               </a:rPr>
@@ -6032,7 +6032,7 @@
             <a:r>
               <a:rPr sz="950" b="1">
                 <a:solidFill>
-                  <a:srgbClr val="17302E"/>
+                  <a:srgbClr val="0E2830"/>
                 </a:solidFill>
                 <a:latin typeface="Outfit"/>
               </a:rPr>
@@ -6051,7 +6051,7 @@
             <a:r>
               <a:rPr sz="819" b="0">
                 <a:solidFill>
-                  <a:srgbClr val="5A7674"/>
+                  <a:srgbClr val="33555F"/>
                 </a:solidFill>
                 <a:latin typeface="Plus Jakarta Sans"/>
               </a:rPr>
@@ -6077,11 +6077,11 @@
             </a:avLst>
           </a:prstGeom>
           <a:solidFill>
-            <a:srgbClr val="F2F8F7"/>
+            <a:srgbClr val="F0F7F8"/>
           </a:solidFill>
           <a:ln w="12700">
             <a:solidFill>
-              <a:srgbClr val="DCEAE8"/>
+              <a:srgbClr val="DCEAED"/>
             </a:solidFill>
           </a:ln>
           <a:effectLst/>
@@ -6141,7 +6141,7 @@
             <a:r>
               <a:rPr sz="1500" b="1">
                 <a:solidFill>
-                  <a:srgbClr val="B55615"/>
+                  <a:srgbClr val="8A6608"/>
                 </a:solidFill>
                 <a:latin typeface="Outfit"/>
               </a:rPr>
@@ -6160,7 +6160,7 @@
             <a:r>
               <a:rPr sz="950" b="1">
                 <a:solidFill>
-                  <a:srgbClr val="17302E"/>
+                  <a:srgbClr val="0E2830"/>
                 </a:solidFill>
                 <a:latin typeface="Outfit"/>
               </a:rPr>
@@ -6179,7 +6179,7 @@
             <a:r>
               <a:rPr sz="819" b="0">
                 <a:solidFill>
-                  <a:srgbClr val="5A7674"/>
+                  <a:srgbClr val="33555F"/>
                 </a:solidFill>
                 <a:latin typeface="Plus Jakarta Sans"/>
               </a:rPr>
@@ -6205,11 +6205,11 @@
             </a:avLst>
           </a:prstGeom>
           <a:solidFill>
-            <a:srgbClr val="F2F8F7"/>
+            <a:srgbClr val="F0F7F8"/>
           </a:solidFill>
           <a:ln w="12700">
             <a:solidFill>
-              <a:srgbClr val="DCEAE8"/>
+              <a:srgbClr val="DCEAED"/>
             </a:solidFill>
           </a:ln>
           <a:effectLst/>
@@ -6269,7 +6269,7 @@
             <a:r>
               <a:rPr sz="1500" b="1">
                 <a:solidFill>
-                  <a:srgbClr val="B55615"/>
+                  <a:srgbClr val="8A6608"/>
                 </a:solidFill>
                 <a:latin typeface="Outfit"/>
               </a:rPr>
@@ -6288,7 +6288,7 @@
             <a:r>
               <a:rPr sz="950" b="1">
                 <a:solidFill>
-                  <a:srgbClr val="17302E"/>
+                  <a:srgbClr val="0E2830"/>
                 </a:solidFill>
                 <a:latin typeface="Outfit"/>
               </a:rPr>
@@ -6307,7 +6307,7 @@
             <a:r>
               <a:rPr sz="819" b="0">
                 <a:solidFill>
-                  <a:srgbClr val="5A7674"/>
+                  <a:srgbClr val="33555F"/>
                 </a:solidFill>
                 <a:latin typeface="Plus Jakarta Sans"/>
               </a:rPr>
@@ -6333,11 +6333,11 @@
             </a:avLst>
           </a:prstGeom>
           <a:solidFill>
-            <a:srgbClr val="F2F8F7"/>
+            <a:srgbClr val="F0F7F8"/>
           </a:solidFill>
           <a:ln w="12700">
             <a:solidFill>
-              <a:srgbClr val="DCEAE8"/>
+              <a:srgbClr val="DCEAED"/>
             </a:solidFill>
           </a:ln>
           <a:effectLst/>
@@ -6397,7 +6397,7 @@
             <a:r>
               <a:rPr sz="1500" b="1">
                 <a:solidFill>
-                  <a:srgbClr val="B55615"/>
+                  <a:srgbClr val="8A6608"/>
                 </a:solidFill>
                 <a:latin typeface="Outfit"/>
               </a:rPr>
@@ -6416,7 +6416,7 @@
             <a:r>
               <a:rPr sz="950" b="1">
                 <a:solidFill>
-                  <a:srgbClr val="17302E"/>
+                  <a:srgbClr val="0E2830"/>
                 </a:solidFill>
                 <a:latin typeface="Outfit"/>
               </a:rPr>
@@ -6435,7 +6435,7 @@
             <a:r>
               <a:rPr sz="819" b="0">
                 <a:solidFill>
-                  <a:srgbClr val="5A7674"/>
+                  <a:srgbClr val="33555F"/>
                 </a:solidFill>
                 <a:latin typeface="Plus Jakarta Sans"/>
               </a:rPr>
@@ -6461,11 +6461,11 @@
             </a:avLst>
           </a:prstGeom>
           <a:solidFill>
-            <a:srgbClr val="0A4B49"/>
+            <a:srgbClr val="0A5F65"/>
           </a:solidFill>
           <a:ln w="12700">
             <a:solidFill>
-              <a:srgbClr val="0A4B49"/>
+              <a:srgbClr val="0A5F65"/>
             </a:solidFill>
           </a:ln>
           <a:effectLst/>
@@ -6525,7 +6525,7 @@
             <a:r>
               <a:rPr sz="1500" b="1">
                 <a:solidFill>
-                  <a:srgbClr val="ED9D67"/>
+                  <a:srgbClr val="FFD264"/>
                 </a:solidFill>
                 <a:latin typeface="Outfit"/>
               </a:rPr>
@@ -6563,7 +6563,7 @@
             <a:r>
               <a:rPr sz="819" b="0">
                 <a:solidFill>
-                  <a:srgbClr val="D3E8E6"/>
+                  <a:srgbClr val="DCF2F3"/>
                 </a:solidFill>
                 <a:latin typeface="Plus Jakarta Sans"/>
               </a:rPr>
@@ -6589,11 +6589,11 @@
             </a:avLst>
           </a:prstGeom>
           <a:solidFill>
-            <a:srgbClr val="FBDCE6"/>
+            <a:srgbClr val="FCE2F0"/>
           </a:solidFill>
           <a:ln w="12700">
             <a:solidFill>
-              <a:srgbClr val="E85C82"/>
+              <a:srgbClr val="F49CCB"/>
             </a:solidFill>
           </a:ln>
           <a:effectLst/>
@@ -6653,7 +6653,7 @@
             <a:r>
               <a:rPr sz="800" b="0" cap="all" spc="180">
                 <a:solidFill>
-                  <a:srgbClr val="C11B48"/>
+                  <a:srgbClr val="C10073"/>
                 </a:solidFill>
                 <a:latin typeface="IBM Plex Mono"/>
               </a:rPr>
@@ -6672,7 +6672,7 @@
             <a:r>
               <a:rPr sz="1100" b="0">
                 <a:solidFill>
-                  <a:srgbClr val="17302E"/>
+                  <a:srgbClr val="33555F"/>
                 </a:solidFill>
                 <a:latin typeface="Plus Jakarta Sans"/>
               </a:rPr>
@@ -6714,7 +6714,7 @@
             <a:r>
               <a:rPr sz="700" b="0" cap="all" spc="140">
                 <a:solidFill>
-                  <a:srgbClr val="8FA6A4"/>
+                  <a:srgbClr val="52737D"/>
                 </a:solidFill>
                 <a:latin typeface="IBM Plex Mono"/>
               </a:rPr>
@@ -6756,7 +6756,7 @@
             <a:r>
               <a:rPr sz="900" b="0">
                 <a:solidFill>
-                  <a:srgbClr val="8FA6A4"/>
+                  <a:srgbClr val="52737D"/>
                 </a:solidFill>
                 <a:latin typeface="IBM Plex Mono"/>
               </a:rPr>
@@ -6798,7 +6798,7 @@
             <a:avLst/>
           </a:prstGeom>
           <a:solidFill>
-            <a:srgbClr val="FFFFFF"/>
+            <a:srgbClr val="FBFDFE"/>
           </a:solidFill>
           <a:ln>
             <a:noFill/>
@@ -6860,7 +6860,7 @@
             <a:r>
               <a:rPr sz="1000" b="0" cap="all" spc="240">
                 <a:solidFill>
-                  <a:srgbClr val="B55615"/>
+                  <a:srgbClr val="8A6608"/>
                 </a:solidFill>
                 <a:latin typeface="IBM Plex Mono"/>
               </a:rPr>
@@ -6902,7 +6902,7 @@
             <a:r>
               <a:rPr sz="3000" b="1">
                 <a:solidFill>
-                  <a:srgbClr val="17302E"/>
+                  <a:srgbClr val="0E2830"/>
                 </a:solidFill>
                 <a:latin typeface="Outfit"/>
               </a:rPr>
@@ -6950,7 +6950,7 @@
                       <a:r>
                         <a:rPr sz="750" b="0" cap="all" spc="140">
                           <a:solidFill>
-                            <a:srgbClr val="5D7573"/>
+                            <a:srgbClr val="52737D"/>
                           </a:solidFill>
                           <a:latin typeface="IBM Plex Mono"/>
                         </a:rPr>
@@ -6960,7 +6960,7 @@
                   </a:txBody>
                   <a:tcPr marL="54864" marR="54864" marT="36576" marB="36576" anchor="b">
                     <a:solidFill>
-                      <a:srgbClr val="FFFFFF"/>
+                      <a:srgbClr val="FBFDFE"/>
                     </a:solidFill>
                   </a:tcPr>
                 </a:tc>
@@ -6980,7 +6980,7 @@
                       <a:r>
                         <a:rPr sz="750" b="0" cap="all" spc="140">
                           <a:solidFill>
-                            <a:srgbClr val="5D7573"/>
+                            <a:srgbClr val="52737D"/>
                           </a:solidFill>
                           <a:latin typeface="IBM Plex Mono"/>
                         </a:rPr>
@@ -6990,7 +6990,7 @@
                   </a:txBody>
                   <a:tcPr marL="54864" marR="54864" marT="36576" marB="36576" anchor="b">
                     <a:solidFill>
-                      <a:srgbClr val="FFFFFF"/>
+                      <a:srgbClr val="FBFDFE"/>
                     </a:solidFill>
                   </a:tcPr>
                 </a:tc>
@@ -7012,7 +7012,7 @@
                       <a:r>
                         <a:rPr sz="1000" b="0">
                           <a:solidFill>
-                            <a:srgbClr val="17302E"/>
+                            <a:srgbClr val="33555F"/>
                           </a:solidFill>
                           <a:latin typeface="Plus Jakarta Sans"/>
                         </a:rPr>
@@ -7042,7 +7042,7 @@
                       <a:r>
                         <a:rPr sz="1000" b="0">
                           <a:solidFill>
-                            <a:srgbClr val="17302E"/>
+                            <a:srgbClr val="33555F"/>
                           </a:solidFill>
                           <a:latin typeface="Plus Jakarta Sans"/>
                         </a:rPr>
@@ -7074,11 +7074,73 @@
                       <a:r>
                         <a:rPr sz="1000" b="0">
                           <a:solidFill>
-                            <a:srgbClr val="17302E"/>
+                            <a:srgbClr val="33555F"/>
                           </a:solidFill>
                           <a:latin typeface="Plus Jakarta Sans"/>
                         </a:rPr>
                         <a:t>Add: Cargo Sales Collection</a:t>
+                      </a:r>
+                    </a:p>
+                  </a:txBody>
+                  <a:tcPr marL="54864" marR="54864" marT="45720" marB="45720" anchor="t">
+                    <a:solidFill>
+                      <a:srgbClr val="FBFDFE"/>
+                    </a:solidFill>
+                  </a:tcPr>
+                </a:tc>
+                <a:tc>
+                  <a:txBody>
+                    <a:bodyPr/>
+                    <a:lstStyle/>
+                    <a:p>
+                      <a:pPr>
+                        <a:lnSpc>
+                          <a:spcPct val="130000"/>
+                        </a:lnSpc>
+                        <a:spcAft>
+                          <a:spcPts val="0"/>
+                        </a:spcAft>
+                      </a:pPr>
+                      <a:r>
+                        <a:rPr sz="1000" b="0">
+                          <a:solidFill>
+                            <a:srgbClr val="33555F"/>
+                          </a:solidFill>
+                          <a:latin typeface="Plus Jakarta Sans"/>
+                        </a:rPr>
+                        <a:t>XXX</a:t>
+                      </a:r>
+                    </a:p>
+                  </a:txBody>
+                  <a:tcPr marL="54864" marR="54864" marT="45720" marB="45720" anchor="t">
+                    <a:solidFill>
+                      <a:srgbClr val="FBFDFE"/>
+                    </a:solidFill>
+                  </a:tcPr>
+                </a:tc>
+              </a:tr>
+              <a:tr h="324612">
+                <a:tc>
+                  <a:txBody>
+                    <a:bodyPr/>
+                    <a:lstStyle/>
+                    <a:p>
+                      <a:pPr>
+                        <a:lnSpc>
+                          <a:spcPct val="130000"/>
+                        </a:lnSpc>
+                        <a:spcAft>
+                          <a:spcPts val="0"/>
+                        </a:spcAft>
+                      </a:pPr>
+                      <a:r>
+                        <a:rPr sz="1000" b="0">
+                          <a:solidFill>
+                            <a:srgbClr val="33555F"/>
+                          </a:solidFill>
+                          <a:latin typeface="Plus Jakarta Sans"/>
+                        </a:rPr>
+                        <a:t>Add: Airline's Over-the-Counter Sale</a:t>
                       </a:r>
                     </a:p>
                   </a:txBody>
@@ -7104,7 +7166,7 @@
                       <a:r>
                         <a:rPr sz="1000" b="0">
                           <a:solidFill>
-                            <a:srgbClr val="17302E"/>
+                            <a:srgbClr val="33555F"/>
                           </a:solidFill>
                           <a:latin typeface="Plus Jakarta Sans"/>
                         </a:rPr>
@@ -7136,11 +7198,197 @@
                       <a:r>
                         <a:rPr sz="1000" b="0">
                           <a:solidFill>
-                            <a:srgbClr val="17302E"/>
+                            <a:srgbClr val="33555F"/>
                           </a:solidFill>
                           <a:latin typeface="Plus Jakarta Sans"/>
                         </a:rPr>
-                        <a:t>Add: Airline's Over-the-Counter Sale</a:t>
+                        <a:t>Add: Misc. Receipts (excess baggage, postal earnings, extra charges)</a:t>
+                      </a:r>
+                    </a:p>
+                  </a:txBody>
+                  <a:tcPr marL="54864" marR="54864" marT="45720" marB="45720" anchor="t">
+                    <a:solidFill>
+                      <a:srgbClr val="FBFDFE"/>
+                    </a:solidFill>
+                  </a:tcPr>
+                </a:tc>
+                <a:tc>
+                  <a:txBody>
+                    <a:bodyPr/>
+                    <a:lstStyle/>
+                    <a:p>
+                      <a:pPr>
+                        <a:lnSpc>
+                          <a:spcPct val="130000"/>
+                        </a:lnSpc>
+                        <a:spcAft>
+                          <a:spcPts val="0"/>
+                        </a:spcAft>
+                      </a:pPr>
+                      <a:r>
+                        <a:rPr sz="1000" b="0">
+                          <a:solidFill>
+                            <a:srgbClr val="33555F"/>
+                          </a:solidFill>
+                          <a:latin typeface="Plus Jakarta Sans"/>
+                        </a:rPr>
+                        <a:t>XXX</a:t>
+                      </a:r>
+                    </a:p>
+                  </a:txBody>
+                  <a:tcPr marL="54864" marR="54864" marT="45720" marB="45720" anchor="t">
+                    <a:solidFill>
+                      <a:srgbClr val="FBFDFE"/>
+                    </a:solidFill>
+                  </a:tcPr>
+                </a:tc>
+              </a:tr>
+              <a:tr h="324612">
+                <a:tc>
+                  <a:txBody>
+                    <a:bodyPr/>
+                    <a:lstStyle/>
+                    <a:p>
+                      <a:pPr>
+                        <a:lnSpc>
+                          <a:spcPct val="130000"/>
+                        </a:lnSpc>
+                        <a:spcAft>
+                          <a:spcPts val="0"/>
+                        </a:spcAft>
+                      </a:pPr>
+                      <a:r>
+                        <a:rPr sz="1000" b="1">
+                          <a:solidFill>
+                            <a:srgbClr val="0E2830"/>
+                          </a:solidFill>
+                          <a:latin typeface="Plus Jakarta Sans"/>
+                        </a:rPr>
+                        <a:t>A.  Total Collection for the Month</a:t>
+                      </a:r>
+                    </a:p>
+                  </a:txBody>
+                  <a:tcPr marL="54864" marR="54864" marT="45720" marB="45720" anchor="t">
+                    <a:solidFill>
+                      <a:srgbClr val="F0F7F8"/>
+                    </a:solidFill>
+                  </a:tcPr>
+                </a:tc>
+                <a:tc>
+                  <a:txBody>
+                    <a:bodyPr/>
+                    <a:lstStyle/>
+                    <a:p>
+                      <a:pPr>
+                        <a:lnSpc>
+                          <a:spcPct val="130000"/>
+                        </a:lnSpc>
+                        <a:spcAft>
+                          <a:spcPts val="0"/>
+                        </a:spcAft>
+                      </a:pPr>
+                      <a:r>
+                        <a:rPr sz="1000" b="1">
+                          <a:solidFill>
+                            <a:srgbClr val="0E2830"/>
+                          </a:solidFill>
+                          <a:latin typeface="Plus Jakarta Sans"/>
+                        </a:rPr>
+                        <a:t>XXXXXX</a:t>
+                      </a:r>
+                    </a:p>
+                  </a:txBody>
+                  <a:tcPr marL="54864" marR="54864" marT="45720" marB="45720" anchor="t">
+                    <a:solidFill>
+                      <a:srgbClr val="F0F7F8"/>
+                    </a:solidFill>
+                  </a:tcPr>
+                </a:tc>
+              </a:tr>
+              <a:tr h="324612">
+                <a:tc>
+                  <a:txBody>
+                    <a:bodyPr/>
+                    <a:lstStyle/>
+                    <a:p>
+                      <a:pPr>
+                        <a:lnSpc>
+                          <a:spcPct val="130000"/>
+                        </a:lnSpc>
+                        <a:spcAft>
+                          <a:spcPts val="0"/>
+                        </a:spcAft>
+                      </a:pPr>
+                      <a:r>
+                        <a:rPr sz="1000" b="0">
+                          <a:solidFill>
+                            <a:srgbClr val="33555F"/>
+                          </a:solidFill>
+                          <a:latin typeface="Plus Jakarta Sans"/>
+                        </a:rPr>
+                        <a:t>Less: Disbursement for the Month</a:t>
+                      </a:r>
+                    </a:p>
+                  </a:txBody>
+                  <a:tcPr marL="54864" marR="54864" marT="45720" marB="45720" anchor="t">
+                    <a:solidFill>
+                      <a:srgbClr val="FBFDFE"/>
+                    </a:solidFill>
+                  </a:tcPr>
+                </a:tc>
+                <a:tc>
+                  <a:txBody>
+                    <a:bodyPr/>
+                    <a:lstStyle/>
+                    <a:p>
+                      <a:pPr>
+                        <a:lnSpc>
+                          <a:spcPct val="130000"/>
+                        </a:lnSpc>
+                        <a:spcAft>
+                          <a:spcPts val="0"/>
+                        </a:spcAft>
+                      </a:pPr>
+                      <a:r>
+                        <a:rPr sz="1000" b="0">
+                          <a:solidFill>
+                            <a:srgbClr val="33555F"/>
+                          </a:solidFill>
+                          <a:latin typeface="Plus Jakarta Sans"/>
+                        </a:rPr>
+                        <a:t>XXX</a:t>
+                      </a:r>
+                    </a:p>
+                  </a:txBody>
+                  <a:tcPr marL="54864" marR="54864" marT="45720" marB="45720" anchor="t">
+                    <a:solidFill>
+                      <a:srgbClr val="FBFDFE"/>
+                    </a:solidFill>
+                  </a:tcPr>
+                </a:tc>
+              </a:tr>
+              <a:tr h="324612">
+                <a:tc>
+                  <a:txBody>
+                    <a:bodyPr/>
+                    <a:lstStyle/>
+                    <a:p>
+                      <a:pPr>
+                        <a:lnSpc>
+                          <a:spcPct val="130000"/>
+                        </a:lnSpc>
+                        <a:spcAft>
+                          <a:spcPts val="0"/>
+                        </a:spcAft>
+                      </a:pPr>
+                      <a:r>
+                        <a:rPr sz="1000" b="0">
+                          <a:solidFill>
+                            <a:srgbClr val="33555F"/>
+                          </a:solidFill>
+                          <a:latin typeface="Plus Jakarta Sans"/>
+                        </a:rPr>
+                        <a:t>Less: Other Adjustment</a:t>
                       </a:r>
                     </a:p>
                   </a:txBody>
@@ -7166,7 +7414,131 @@
                       <a:r>
                         <a:rPr sz="1000" b="0">
                           <a:solidFill>
-                            <a:srgbClr val="17302E"/>
+                            <a:srgbClr val="33555F"/>
+                          </a:solidFill>
+                          <a:latin typeface="Plus Jakarta Sans"/>
+                        </a:rPr>
+                        <a:t>XXX</a:t>
+                      </a:r>
+                    </a:p>
+                  </a:txBody>
+                  <a:tcPr marL="54864" marR="54864" marT="45720" marB="45720" anchor="t">
+                    <a:solidFill>
+                      <a:srgbClr val="FFFFFF"/>
+                    </a:solidFill>
+                  </a:tcPr>
+                </a:tc>
+              </a:tr>
+              <a:tr h="324612">
+                <a:tc>
+                  <a:txBody>
+                    <a:bodyPr/>
+                    <a:lstStyle/>
+                    <a:p>
+                      <a:pPr>
+                        <a:lnSpc>
+                          <a:spcPct val="130000"/>
+                        </a:lnSpc>
+                        <a:spcAft>
+                          <a:spcPts val="0"/>
+                        </a:spcAft>
+                      </a:pPr>
+                      <a:r>
+                        <a:rPr sz="1000" b="1">
+                          <a:solidFill>
+                            <a:srgbClr val="0E2830"/>
+                          </a:solidFill>
+                          <a:latin typeface="Plus Jakarta Sans"/>
+                        </a:rPr>
+                        <a:t>B.  Total Disbursement for the Month</a:t>
+                      </a:r>
+                    </a:p>
+                  </a:txBody>
+                  <a:tcPr marL="54864" marR="54864" marT="45720" marB="45720" anchor="t">
+                    <a:solidFill>
+                      <a:srgbClr val="F0F7F8"/>
+                    </a:solidFill>
+                  </a:tcPr>
+                </a:tc>
+                <a:tc>
+                  <a:txBody>
+                    <a:bodyPr/>
+                    <a:lstStyle/>
+                    <a:p>
+                      <a:pPr>
+                        <a:lnSpc>
+                          <a:spcPct val="130000"/>
+                        </a:lnSpc>
+                        <a:spcAft>
+                          <a:spcPts val="0"/>
+                        </a:spcAft>
+                      </a:pPr>
+                      <a:r>
+                        <a:rPr sz="1000" b="1">
+                          <a:solidFill>
+                            <a:srgbClr val="0E2830"/>
+                          </a:solidFill>
+                          <a:latin typeface="Plus Jakarta Sans"/>
+                        </a:rPr>
+                        <a:t>XXXXXX</a:t>
+                      </a:r>
+                    </a:p>
+                  </a:txBody>
+                  <a:tcPr marL="54864" marR="54864" marT="45720" marB="45720" anchor="t">
+                    <a:solidFill>
+                      <a:srgbClr val="F0F7F8"/>
+                    </a:solidFill>
+                  </a:tcPr>
+                </a:tc>
+              </a:tr>
+              <a:tr h="324612">
+                <a:tc>
+                  <a:txBody>
+                    <a:bodyPr/>
+                    <a:lstStyle/>
+                    <a:p>
+                      <a:pPr>
+                        <a:lnSpc>
+                          <a:spcPct val="130000"/>
+                        </a:lnSpc>
+                        <a:spcAft>
+                          <a:spcPts val="0"/>
+                        </a:spcAft>
+                      </a:pPr>
+                      <a:r>
+                        <a:rPr sz="1000" b="0">
+                          <a:solidFill>
+                            <a:srgbClr val="33555F"/>
+                          </a:solidFill>
+                          <a:latin typeface="Plus Jakarta Sans"/>
+                        </a:rPr>
+                        <a:t>i.  Provision for refund, 10% of passenger revenue (current month)</a:t>
+                      </a:r>
+                    </a:p>
+                  </a:txBody>
+                  <a:tcPr marL="54864" marR="54864" marT="45720" marB="45720" anchor="t">
+                    <a:solidFill>
+                      <a:srgbClr val="FFFFFF"/>
+                    </a:solidFill>
+                  </a:tcPr>
+                </a:tc>
+                <a:tc>
+                  <a:txBody>
+                    <a:bodyPr/>
+                    <a:lstStyle/>
+                    <a:p>
+                      <a:pPr>
+                        <a:lnSpc>
+                          <a:spcPct val="130000"/>
+                        </a:lnSpc>
+                        <a:spcAft>
+                          <a:spcPts val="0"/>
+                        </a:spcAft>
+                      </a:pPr>
+                      <a:r>
+                        <a:rPr sz="1000" b="0">
+                          <a:solidFill>
+                            <a:srgbClr val="33555F"/>
                           </a:solidFill>
                           <a:latin typeface="Plus Jakarta Sans"/>
                         </a:rPr>
@@ -7198,17 +7570,17 @@
                       <a:r>
                         <a:rPr sz="1000" b="0">
                           <a:solidFill>
-                            <a:srgbClr val="17302E"/>
+                            <a:srgbClr val="33555F"/>
                           </a:solidFill>
                           <a:latin typeface="Plus Jakarta Sans"/>
                         </a:rPr>
-                        <a:t>Add: Misc. Receipts (excess baggage, postal earnings, extra charges)</a:t>
+                        <a:t>ii.  Unused provision for refund, earlier period (previous month)</a:t>
                       </a:r>
                     </a:p>
                   </a:txBody>
                   <a:tcPr marL="54864" marR="54864" marT="45720" marB="45720" anchor="t">
                     <a:solidFill>
-                      <a:srgbClr val="FFFFFF"/>
+                      <a:srgbClr val="FBFDFE"/>
                     </a:solidFill>
                   </a:tcPr>
                 </a:tc>
@@ -7228,7 +7600,7 @@
                       <a:r>
                         <a:rPr sz="1000" b="0">
                           <a:solidFill>
-                            <a:srgbClr val="17302E"/>
+                            <a:srgbClr val="33555F"/>
                           </a:solidFill>
                           <a:latin typeface="Plus Jakarta Sans"/>
                         </a:rPr>
@@ -7238,7 +7610,7 @@
                   </a:txBody>
                   <a:tcPr marL="54864" marR="54864" marT="45720" marB="45720" anchor="t">
                     <a:solidFill>
-                      <a:srgbClr val="FFFFFF"/>
+                      <a:srgbClr val="FBFDFE"/>
                     </a:solidFill>
                   </a:tcPr>
                 </a:tc>
@@ -7260,17 +7632,17 @@
                       <a:r>
                         <a:rPr sz="1000" b="1">
                           <a:solidFill>
-                            <a:srgbClr val="17302E"/>
+                            <a:srgbClr val="0E2830"/>
                           </a:solidFill>
                           <a:latin typeface="Plus Jakarta Sans"/>
                         </a:rPr>
-                        <a:t>A.  Total Collection for the Month</a:t>
+                        <a:t>C.  Net Provision (i - ii)</a:t>
                       </a:r>
                     </a:p>
                   </a:txBody>
                   <a:tcPr marL="54864" marR="54864" marT="45720" marB="45720" anchor="t">
                     <a:solidFill>
-                      <a:srgbClr val="F2F8F7"/>
+                      <a:srgbClr val="F0F7F8"/>
                     </a:solidFill>
                   </a:tcPr>
                 </a:tc>
@@ -7290,7 +7662,7 @@
                       <a:r>
                         <a:rPr sz="1000" b="1">
                           <a:solidFill>
-                            <a:srgbClr val="17302E"/>
+                            <a:srgbClr val="0E2830"/>
                           </a:solidFill>
                           <a:latin typeface="Plus Jakarta Sans"/>
                         </a:rPr>
@@ -7300,379 +7672,7 @@
                   </a:txBody>
                   <a:tcPr marL="54864" marR="54864" marT="45720" marB="45720" anchor="t">
                     <a:solidFill>
-                      <a:srgbClr val="F2F8F7"/>
-                    </a:solidFill>
-                  </a:tcPr>
-                </a:tc>
-              </a:tr>
-              <a:tr h="324612">
-                <a:tc>
-                  <a:txBody>
-                    <a:bodyPr/>
-                    <a:lstStyle/>
-                    <a:p>
-                      <a:pPr>
-                        <a:lnSpc>
-                          <a:spcPct val="130000"/>
-                        </a:lnSpc>
-                        <a:spcAft>
-                          <a:spcPts val="0"/>
-                        </a:spcAft>
-                      </a:pPr>
-                      <a:r>
-                        <a:rPr sz="1000" b="0">
-                          <a:solidFill>
-                            <a:srgbClr val="17302E"/>
-                          </a:solidFill>
-                          <a:latin typeface="Plus Jakarta Sans"/>
-                        </a:rPr>
-                        <a:t>Less: Disbursement for the Month</a:t>
-                      </a:r>
-                    </a:p>
-                  </a:txBody>
-                  <a:tcPr marL="54864" marR="54864" marT="45720" marB="45720" anchor="t">
-                    <a:solidFill>
-                      <a:srgbClr val="FFFFFF"/>
-                    </a:solidFill>
-                  </a:tcPr>
-                </a:tc>
-                <a:tc>
-                  <a:txBody>
-                    <a:bodyPr/>
-                    <a:lstStyle/>
-                    <a:p>
-                      <a:pPr>
-                        <a:lnSpc>
-                          <a:spcPct val="130000"/>
-                        </a:lnSpc>
-                        <a:spcAft>
-                          <a:spcPts val="0"/>
-                        </a:spcAft>
-                      </a:pPr>
-                      <a:r>
-                        <a:rPr sz="1000" b="0">
-                          <a:solidFill>
-                            <a:srgbClr val="17302E"/>
-                          </a:solidFill>
-                          <a:latin typeface="Plus Jakarta Sans"/>
-                        </a:rPr>
-                        <a:t>XXX</a:t>
-                      </a:r>
-                    </a:p>
-                  </a:txBody>
-                  <a:tcPr marL="54864" marR="54864" marT="45720" marB="45720" anchor="t">
-                    <a:solidFill>
-                      <a:srgbClr val="FFFFFF"/>
-                    </a:solidFill>
-                  </a:tcPr>
-                </a:tc>
-              </a:tr>
-              <a:tr h="324612">
-                <a:tc>
-                  <a:txBody>
-                    <a:bodyPr/>
-                    <a:lstStyle/>
-                    <a:p>
-                      <a:pPr>
-                        <a:lnSpc>
-                          <a:spcPct val="130000"/>
-                        </a:lnSpc>
-                        <a:spcAft>
-                          <a:spcPts val="0"/>
-                        </a:spcAft>
-                      </a:pPr>
-                      <a:r>
-                        <a:rPr sz="1000" b="0">
-                          <a:solidFill>
-                            <a:srgbClr val="17302E"/>
-                          </a:solidFill>
-                          <a:latin typeface="Plus Jakarta Sans"/>
-                        </a:rPr>
-                        <a:t>Less: Other Adjustment</a:t>
-                      </a:r>
-                    </a:p>
-                  </a:txBody>
-                  <a:tcPr marL="54864" marR="54864" marT="45720" marB="45720" anchor="t">
-                    <a:solidFill>
-                      <a:srgbClr val="FFFFFF"/>
-                    </a:solidFill>
-                  </a:tcPr>
-                </a:tc>
-                <a:tc>
-                  <a:txBody>
-                    <a:bodyPr/>
-                    <a:lstStyle/>
-                    <a:p>
-                      <a:pPr>
-                        <a:lnSpc>
-                          <a:spcPct val="130000"/>
-                        </a:lnSpc>
-                        <a:spcAft>
-                          <a:spcPts val="0"/>
-                        </a:spcAft>
-                      </a:pPr>
-                      <a:r>
-                        <a:rPr sz="1000" b="0">
-                          <a:solidFill>
-                            <a:srgbClr val="17302E"/>
-                          </a:solidFill>
-                          <a:latin typeface="Plus Jakarta Sans"/>
-                        </a:rPr>
-                        <a:t>XXX</a:t>
-                      </a:r>
-                    </a:p>
-                  </a:txBody>
-                  <a:tcPr marL="54864" marR="54864" marT="45720" marB="45720" anchor="t">
-                    <a:solidFill>
-                      <a:srgbClr val="FFFFFF"/>
-                    </a:solidFill>
-                  </a:tcPr>
-                </a:tc>
-              </a:tr>
-              <a:tr h="324612">
-                <a:tc>
-                  <a:txBody>
-                    <a:bodyPr/>
-                    <a:lstStyle/>
-                    <a:p>
-                      <a:pPr>
-                        <a:lnSpc>
-                          <a:spcPct val="130000"/>
-                        </a:lnSpc>
-                        <a:spcAft>
-                          <a:spcPts val="0"/>
-                        </a:spcAft>
-                      </a:pPr>
-                      <a:r>
-                        <a:rPr sz="1000" b="1">
-                          <a:solidFill>
-                            <a:srgbClr val="17302E"/>
-                          </a:solidFill>
-                          <a:latin typeface="Plus Jakarta Sans"/>
-                        </a:rPr>
-                        <a:t>B.  Total Disbursement for the Month</a:t>
-                      </a:r>
-                    </a:p>
-                  </a:txBody>
-                  <a:tcPr marL="54864" marR="54864" marT="45720" marB="45720" anchor="t">
-                    <a:solidFill>
-                      <a:srgbClr val="F2F8F7"/>
-                    </a:solidFill>
-                  </a:tcPr>
-                </a:tc>
-                <a:tc>
-                  <a:txBody>
-                    <a:bodyPr/>
-                    <a:lstStyle/>
-                    <a:p>
-                      <a:pPr>
-                        <a:lnSpc>
-                          <a:spcPct val="130000"/>
-                        </a:lnSpc>
-                        <a:spcAft>
-                          <a:spcPts val="0"/>
-                        </a:spcAft>
-                      </a:pPr>
-                      <a:r>
-                        <a:rPr sz="1000" b="1">
-                          <a:solidFill>
-                            <a:srgbClr val="17302E"/>
-                          </a:solidFill>
-                          <a:latin typeface="Plus Jakarta Sans"/>
-                        </a:rPr>
-                        <a:t>XXXXXX</a:t>
-                      </a:r>
-                    </a:p>
-                  </a:txBody>
-                  <a:tcPr marL="54864" marR="54864" marT="45720" marB="45720" anchor="t">
-                    <a:solidFill>
-                      <a:srgbClr val="F2F8F7"/>
-                    </a:solidFill>
-                  </a:tcPr>
-                </a:tc>
-              </a:tr>
-              <a:tr h="324612">
-                <a:tc>
-                  <a:txBody>
-                    <a:bodyPr/>
-                    <a:lstStyle/>
-                    <a:p>
-                      <a:pPr>
-                        <a:lnSpc>
-                          <a:spcPct val="130000"/>
-                        </a:lnSpc>
-                        <a:spcAft>
-                          <a:spcPts val="0"/>
-                        </a:spcAft>
-                      </a:pPr>
-                      <a:r>
-                        <a:rPr sz="1000" b="0">
-                          <a:solidFill>
-                            <a:srgbClr val="17302E"/>
-                          </a:solidFill>
-                          <a:latin typeface="Plus Jakarta Sans"/>
-                        </a:rPr>
-                        <a:t>i.  Provision for refund, 10% of passenger revenue (current month)</a:t>
-                      </a:r>
-                    </a:p>
-                  </a:txBody>
-                  <a:tcPr marL="54864" marR="54864" marT="45720" marB="45720" anchor="t">
-                    <a:solidFill>
-                      <a:srgbClr val="FFFFFF"/>
-                    </a:solidFill>
-                  </a:tcPr>
-                </a:tc>
-                <a:tc>
-                  <a:txBody>
-                    <a:bodyPr/>
-                    <a:lstStyle/>
-                    <a:p>
-                      <a:pPr>
-                        <a:lnSpc>
-                          <a:spcPct val="130000"/>
-                        </a:lnSpc>
-                        <a:spcAft>
-                          <a:spcPts val="0"/>
-                        </a:spcAft>
-                      </a:pPr>
-                      <a:r>
-                        <a:rPr sz="1000" b="0">
-                          <a:solidFill>
-                            <a:srgbClr val="17302E"/>
-                          </a:solidFill>
-                          <a:latin typeface="Plus Jakarta Sans"/>
-                        </a:rPr>
-                        <a:t>XXX</a:t>
-                      </a:r>
-                    </a:p>
-                  </a:txBody>
-                  <a:tcPr marL="54864" marR="54864" marT="45720" marB="45720" anchor="t">
-                    <a:solidFill>
-                      <a:srgbClr val="FFFFFF"/>
-                    </a:solidFill>
-                  </a:tcPr>
-                </a:tc>
-              </a:tr>
-              <a:tr h="324612">
-                <a:tc>
-                  <a:txBody>
-                    <a:bodyPr/>
-                    <a:lstStyle/>
-                    <a:p>
-                      <a:pPr>
-                        <a:lnSpc>
-                          <a:spcPct val="130000"/>
-                        </a:lnSpc>
-                        <a:spcAft>
-                          <a:spcPts val="0"/>
-                        </a:spcAft>
-                      </a:pPr>
-                      <a:r>
-                        <a:rPr sz="1000" b="0">
-                          <a:solidFill>
-                            <a:srgbClr val="17302E"/>
-                          </a:solidFill>
-                          <a:latin typeface="Plus Jakarta Sans"/>
-                        </a:rPr>
-                        <a:t>ii.  Unused provision for refund, earlier period (previous month)</a:t>
-                      </a:r>
-                    </a:p>
-                  </a:txBody>
-                  <a:tcPr marL="54864" marR="54864" marT="45720" marB="45720" anchor="t">
-                    <a:solidFill>
-                      <a:srgbClr val="FFFFFF"/>
-                    </a:solidFill>
-                  </a:tcPr>
-                </a:tc>
-                <a:tc>
-                  <a:txBody>
-                    <a:bodyPr/>
-                    <a:lstStyle/>
-                    <a:p>
-                      <a:pPr>
-                        <a:lnSpc>
-                          <a:spcPct val="130000"/>
-                        </a:lnSpc>
-                        <a:spcAft>
-                          <a:spcPts val="0"/>
-                        </a:spcAft>
-                      </a:pPr>
-                      <a:r>
-                        <a:rPr sz="1000" b="0">
-                          <a:solidFill>
-                            <a:srgbClr val="17302E"/>
-                          </a:solidFill>
-                          <a:latin typeface="Plus Jakarta Sans"/>
-                        </a:rPr>
-                        <a:t>XXX</a:t>
-                      </a:r>
-                    </a:p>
-                  </a:txBody>
-                  <a:tcPr marL="54864" marR="54864" marT="45720" marB="45720" anchor="t">
-                    <a:solidFill>
-                      <a:srgbClr val="FFFFFF"/>
-                    </a:solidFill>
-                  </a:tcPr>
-                </a:tc>
-              </a:tr>
-              <a:tr h="324612">
-                <a:tc>
-                  <a:txBody>
-                    <a:bodyPr/>
-                    <a:lstStyle/>
-                    <a:p>
-                      <a:pPr>
-                        <a:lnSpc>
-                          <a:spcPct val="130000"/>
-                        </a:lnSpc>
-                        <a:spcAft>
-                          <a:spcPts val="0"/>
-                        </a:spcAft>
-                      </a:pPr>
-                      <a:r>
-                        <a:rPr sz="1000" b="1">
-                          <a:solidFill>
-                            <a:srgbClr val="17302E"/>
-                          </a:solidFill>
-                          <a:latin typeface="Plus Jakarta Sans"/>
-                        </a:rPr>
-                        <a:t>C.  Net Provision (i - ii)</a:t>
-                      </a:r>
-                    </a:p>
-                  </a:txBody>
-                  <a:tcPr marL="54864" marR="54864" marT="45720" marB="45720" anchor="t">
-                    <a:solidFill>
-                      <a:srgbClr val="F2F8F7"/>
-                    </a:solidFill>
-                  </a:tcPr>
-                </a:tc>
-                <a:tc>
-                  <a:txBody>
-                    <a:bodyPr/>
-                    <a:lstStyle/>
-                    <a:p>
-                      <a:pPr>
-                        <a:lnSpc>
-                          <a:spcPct val="130000"/>
-                        </a:lnSpc>
-                        <a:spcAft>
-                          <a:spcPts val="0"/>
-                        </a:spcAft>
-                      </a:pPr>
-                      <a:r>
-                        <a:rPr sz="1000" b="1">
-                          <a:solidFill>
-                            <a:srgbClr val="17302E"/>
-                          </a:solidFill>
-                          <a:latin typeface="Plus Jakarta Sans"/>
-                        </a:rPr>
-                        <a:t>XXXXXX</a:t>
-                      </a:r>
-                    </a:p>
-                  </a:txBody>
-                  <a:tcPr marL="54864" marR="54864" marT="45720" marB="45720" anchor="t">
-                    <a:solidFill>
-                      <a:srgbClr val="F2F8F7"/>
+                      <a:srgbClr val="F0F7F8"/>
                     </a:solidFill>
                   </a:tcPr>
                 </a:tc>
@@ -7704,7 +7704,7 @@
                   </a:txBody>
                   <a:tcPr marL="54864" marR="54864" marT="45720" marB="45720" anchor="t">
                     <a:solidFill>
-                      <a:srgbClr val="0A4B49"/>
+                      <a:srgbClr val="0A5F65"/>
                     </a:solidFill>
                   </a:tcPr>
                 </a:tc>
@@ -7734,7 +7734,7 @@
                   </a:txBody>
                   <a:tcPr marL="54864" marR="54864" marT="45720" marB="45720" anchor="t">
                     <a:solidFill>
-                      <a:srgbClr val="0A4B49"/>
+                      <a:srgbClr val="0A5F65"/>
                     </a:solidFill>
                   </a:tcPr>
                 </a:tc>
@@ -7776,7 +7776,7 @@
             <a:r>
               <a:rPr sz="700" b="0" cap="all" spc="140">
                 <a:solidFill>
-                  <a:srgbClr val="8FA6A4"/>
+                  <a:srgbClr val="52737D"/>
                 </a:solidFill>
                 <a:latin typeface="IBM Plex Mono"/>
               </a:rPr>
@@ -7818,7 +7818,7 @@
             <a:r>
               <a:rPr sz="900" b="0">
                 <a:solidFill>
-                  <a:srgbClr val="8FA6A4"/>
+                  <a:srgbClr val="52737D"/>
                 </a:solidFill>
                 <a:latin typeface="IBM Plex Mono"/>
               </a:rPr>
@@ -7860,7 +7860,7 @@
             <a:avLst/>
           </a:prstGeom>
           <a:solidFill>
-            <a:srgbClr val="FFFFFF"/>
+            <a:srgbClr val="FBFDFE"/>
           </a:solidFill>
           <a:ln>
             <a:noFill/>
@@ -7922,7 +7922,7 @@
             <a:r>
               <a:rPr sz="1000" b="0" cap="all" spc="240">
                 <a:solidFill>
-                  <a:srgbClr val="B55615"/>
+                  <a:srgbClr val="8A6608"/>
                 </a:solidFill>
                 <a:latin typeface="IBM Plex Mono"/>
               </a:rPr>
@@ -7964,7 +7964,7 @@
             <a:r>
               <a:rPr sz="2900" b="1">
                 <a:solidFill>
-                  <a:srgbClr val="17302E"/>
+                  <a:srgbClr val="0E2830"/>
                 </a:solidFill>
                 <a:latin typeface="Outfit"/>
               </a:rPr>
@@ -8006,7 +8006,7 @@
             <a:r>
               <a:rPr sz="800" b="0" cap="all" spc="180">
                 <a:solidFill>
-                  <a:srgbClr val="5D7573"/>
+                  <a:srgbClr val="52737D"/>
                 </a:solidFill>
                 <a:latin typeface="IBM Plex Mono"/>
               </a:rPr>
@@ -8032,11 +8032,11 @@
             </a:avLst>
           </a:prstGeom>
           <a:solidFill>
-            <a:srgbClr val="F2F8F7"/>
+            <a:srgbClr val="F0F7F8"/>
           </a:solidFill>
           <a:ln w="12700">
             <a:solidFill>
-              <a:srgbClr val="DCEAE8"/>
+              <a:srgbClr val="DCEAED"/>
             </a:solidFill>
           </a:ln>
           <a:effectLst/>
@@ -8096,7 +8096,7 @@
             <a:r>
               <a:rPr sz="1150" b="1">
                 <a:solidFill>
-                  <a:srgbClr val="17302E"/>
+                  <a:srgbClr val="0E2830"/>
                 </a:solidFill>
                 <a:latin typeface="Outfit"/>
               </a:rPr>
@@ -8115,7 +8115,7 @@
             <a:r>
               <a:rPr sz="950" b="0">
                 <a:solidFill>
-                  <a:srgbClr val="5A7674"/>
+                  <a:srgbClr val="33555F"/>
                 </a:solidFill>
                 <a:latin typeface="Plus Jakarta Sans"/>
               </a:rPr>
@@ -8141,11 +8141,11 @@
             </a:avLst>
           </a:prstGeom>
           <a:solidFill>
-            <a:srgbClr val="F2F8F7"/>
+            <a:srgbClr val="F0F7F8"/>
           </a:solidFill>
           <a:ln w="12700">
             <a:solidFill>
-              <a:srgbClr val="DCEAE8"/>
+              <a:srgbClr val="DCEAED"/>
             </a:solidFill>
           </a:ln>
           <a:effectLst/>
@@ -8205,7 +8205,7 @@
             <a:r>
               <a:rPr sz="1150" b="1">
                 <a:solidFill>
-                  <a:srgbClr val="17302E"/>
+                  <a:srgbClr val="0E2830"/>
                 </a:solidFill>
                 <a:latin typeface="Outfit"/>
               </a:rPr>
@@ -8224,7 +8224,7 @@
             <a:r>
               <a:rPr sz="950" b="0">
                 <a:solidFill>
-                  <a:srgbClr val="5A7674"/>
+                  <a:srgbClr val="33555F"/>
                 </a:solidFill>
                 <a:latin typeface="Plus Jakarta Sans"/>
               </a:rPr>
@@ -8250,11 +8250,11 @@
             </a:avLst>
           </a:prstGeom>
           <a:solidFill>
-            <a:srgbClr val="F2F8F7"/>
+            <a:srgbClr val="F0F7F8"/>
           </a:solidFill>
           <a:ln w="12700">
             <a:solidFill>
-              <a:srgbClr val="DCEAE8"/>
+              <a:srgbClr val="DCEAED"/>
             </a:solidFill>
           </a:ln>
           <a:effectLst/>
@@ -8314,7 +8314,7 @@
             <a:r>
               <a:rPr sz="1150" b="1">
                 <a:solidFill>
-                  <a:srgbClr val="17302E"/>
+                  <a:srgbClr val="0E2830"/>
                 </a:solidFill>
                 <a:latin typeface="Outfit"/>
               </a:rPr>
@@ -8333,7 +8333,7 @@
             <a:r>
               <a:rPr sz="950" b="0">
                 <a:solidFill>
-                  <a:srgbClr val="5A7674"/>
+                  <a:srgbClr val="33555F"/>
                 </a:solidFill>
                 <a:latin typeface="Plus Jakarta Sans"/>
               </a:rPr>
@@ -8375,7 +8375,7 @@
             <a:r>
               <a:rPr sz="800" b="0" cap="all" spc="180">
                 <a:solidFill>
-                  <a:srgbClr val="5D7573"/>
+                  <a:srgbClr val="52737D"/>
                 </a:solidFill>
                 <a:latin typeface="IBM Plex Mono"/>
               </a:rPr>
@@ -8401,11 +8401,11 @@
             </a:avLst>
           </a:prstGeom>
           <a:solidFill>
-            <a:srgbClr val="0A4B49"/>
+            <a:srgbClr val="0A5F65"/>
           </a:solidFill>
           <a:ln w="12700">
             <a:solidFill>
-              <a:srgbClr val="0A4B49"/>
+              <a:srgbClr val="0A5F65"/>
             </a:solidFill>
           </a:ln>
           <a:effectLst/>
@@ -8465,7 +8465,7 @@
             <a:r>
               <a:rPr sz="800" b="0" cap="all" spc="180">
                 <a:solidFill>
-                  <a:srgbClr val="9DC4C1"/>
+                  <a:srgbClr val="A9D6D9"/>
                 </a:solidFill>
                 <a:latin typeface="IBM Plex Mono"/>
               </a:rPr>
@@ -8489,7 +8489,7 @@
             <a:avLst/>
           </a:prstGeom>
           <a:solidFill>
-            <a:srgbClr val="E8823D"/>
+            <a:srgbClr val="E9B949"/>
           </a:solidFill>
           <a:ln>
             <a:noFill/>
@@ -8551,7 +8551,7 @@
             <a:r>
               <a:rPr sz="1000" b="0">
                 <a:solidFill>
-                  <a:srgbClr val="D3E8E6"/>
+                  <a:srgbClr val="DCF2F3"/>
                 </a:solidFill>
                 <a:latin typeface="Plus Jakarta Sans"/>
               </a:rPr>
@@ -8575,7 +8575,7 @@
             <a:avLst/>
           </a:prstGeom>
           <a:solidFill>
-            <a:srgbClr val="E8823D"/>
+            <a:srgbClr val="E9B949"/>
           </a:solidFill>
           <a:ln>
             <a:noFill/>
@@ -8637,7 +8637,7 @@
             <a:r>
               <a:rPr sz="1000" b="0">
                 <a:solidFill>
-                  <a:srgbClr val="D3E8E6"/>
+                  <a:srgbClr val="DCF2F3"/>
                 </a:solidFill>
                 <a:latin typeface="Plus Jakarta Sans"/>
               </a:rPr>
@@ -8661,7 +8661,7 @@
             <a:avLst/>
           </a:prstGeom>
           <a:solidFill>
-            <a:srgbClr val="E8823D"/>
+            <a:srgbClr val="E9B949"/>
           </a:solidFill>
           <a:ln>
             <a:noFill/>
@@ -8723,7 +8723,7 @@
             <a:r>
               <a:rPr sz="1000" b="0">
                 <a:solidFill>
-                  <a:srgbClr val="D3E8E6"/>
+                  <a:srgbClr val="DCF2F3"/>
                 </a:solidFill>
                 <a:latin typeface="Plus Jakarta Sans"/>
               </a:rPr>
@@ -8749,11 +8749,11 @@
             </a:avLst>
           </a:prstGeom>
           <a:solidFill>
-            <a:srgbClr val="F2F8F7"/>
+            <a:srgbClr val="F0F7F8"/>
           </a:solidFill>
           <a:ln w="12700">
             <a:solidFill>
-              <a:srgbClr val="DCEAE8"/>
+              <a:srgbClr val="DCEAED"/>
             </a:solidFill>
           </a:ln>
           <a:effectLst/>
@@ -8813,7 +8813,7 @@
             <a:r>
               <a:rPr sz="800" b="0" cap="all" spc="180">
                 <a:solidFill>
-                  <a:srgbClr val="5D7573"/>
+                  <a:srgbClr val="52737D"/>
                 </a:solidFill>
                 <a:latin typeface="IBM Plex Mono"/>
               </a:rPr>
@@ -8837,7 +8837,7 @@
             <a:avLst/>
           </a:prstGeom>
           <a:solidFill>
-            <a:srgbClr val="0E6B68"/>
+            <a:srgbClr val="E9B949"/>
           </a:solidFill>
           <a:ln>
             <a:noFill/>
@@ -8899,7 +8899,7 @@
             <a:r>
               <a:rPr sz="1000" b="0">
                 <a:solidFill>
-                  <a:srgbClr val="5A7674"/>
+                  <a:srgbClr val="33555F"/>
                 </a:solidFill>
                 <a:latin typeface="Plus Jakarta Sans"/>
               </a:rPr>
@@ -8923,7 +8923,7 @@
             <a:avLst/>
           </a:prstGeom>
           <a:solidFill>
-            <a:srgbClr val="0E6B68"/>
+            <a:srgbClr val="E9B949"/>
           </a:solidFill>
           <a:ln>
             <a:noFill/>
@@ -8985,7 +8985,7 @@
             <a:r>
               <a:rPr sz="1000" b="0">
                 <a:solidFill>
-                  <a:srgbClr val="5A7674"/>
+                  <a:srgbClr val="33555F"/>
                 </a:solidFill>
                 <a:latin typeface="Plus Jakarta Sans"/>
               </a:rPr>
@@ -9027,7 +9027,7 @@
             <a:r>
               <a:rPr sz="700" b="0" cap="all" spc="140">
                 <a:solidFill>
-                  <a:srgbClr val="8FA6A4"/>
+                  <a:srgbClr val="52737D"/>
                 </a:solidFill>
                 <a:latin typeface="IBM Plex Mono"/>
               </a:rPr>
@@ -9069,7 +9069,7 @@
             <a:r>
               <a:rPr sz="900" b="0">
                 <a:solidFill>
-                  <a:srgbClr val="8FA6A4"/>
+                  <a:srgbClr val="52737D"/>
                 </a:solidFill>
                 <a:latin typeface="IBM Plex Mono"/>
               </a:rPr>
@@ -9111,7 +9111,7 @@
             <a:avLst/>
           </a:prstGeom>
           <a:solidFill>
-            <a:srgbClr val="FFFFFF"/>
+            <a:srgbClr val="FBFDFE"/>
           </a:solidFill>
           <a:ln>
             <a:noFill/>
@@ -9173,7 +9173,7 @@
             <a:r>
               <a:rPr sz="1000" b="0" cap="all" spc="240">
                 <a:solidFill>
-                  <a:srgbClr val="B55615"/>
+                  <a:srgbClr val="8A6608"/>
                 </a:solidFill>
                 <a:latin typeface="IBM Plex Mono"/>
               </a:rPr>
@@ -9215,7 +9215,7 @@
             <a:r>
               <a:rPr sz="3000" b="1">
                 <a:solidFill>
-                  <a:srgbClr val="17302E"/>
+                  <a:srgbClr val="0E2830"/>
                 </a:solidFill>
                 <a:latin typeface="Outfit"/>
               </a:rPr>
@@ -9241,11 +9241,11 @@
             </a:avLst>
           </a:prstGeom>
           <a:solidFill>
-            <a:srgbClr val="F2F8F7"/>
+            <a:srgbClr val="F0F7F8"/>
           </a:solidFill>
           <a:ln w="12700">
             <a:solidFill>
-              <a:srgbClr val="DCEAE8"/>
+              <a:srgbClr val="DCEAED"/>
             </a:solidFill>
           </a:ln>
           <a:effectLst/>
@@ -9305,7 +9305,7 @@
             <a:r>
               <a:rPr sz="1000" b="0">
                 <a:solidFill>
-                  <a:srgbClr val="5A7674"/>
+                  <a:srgbClr val="33555F"/>
                 </a:solidFill>
                 <a:latin typeface="Plus Jakarta Sans"/>
               </a:rPr>
@@ -9331,11 +9331,11 @@
             </a:avLst>
           </a:prstGeom>
           <a:solidFill>
-            <a:srgbClr val="F2F8F7"/>
+            <a:srgbClr val="F0F7F8"/>
           </a:solidFill>
           <a:ln w="12700">
             <a:solidFill>
-              <a:srgbClr val="DCEAE8"/>
+              <a:srgbClr val="DCEAED"/>
             </a:solidFill>
           </a:ln>
           <a:effectLst/>
@@ -9395,7 +9395,7 @@
             <a:r>
               <a:rPr sz="1000" b="0">
                 <a:solidFill>
-                  <a:srgbClr val="5A7674"/>
+                  <a:srgbClr val="33555F"/>
                 </a:solidFill>
                 <a:latin typeface="Plus Jakarta Sans"/>
               </a:rPr>
@@ -9421,11 +9421,11 @@
             </a:avLst>
           </a:prstGeom>
           <a:solidFill>
-            <a:srgbClr val="F2F8F7"/>
+            <a:srgbClr val="F0F7F8"/>
           </a:solidFill>
           <a:ln w="12700">
             <a:solidFill>
-              <a:srgbClr val="DCEAE8"/>
+              <a:srgbClr val="DCEAED"/>
             </a:solidFill>
           </a:ln>
           <a:effectLst/>
@@ -9485,7 +9485,7 @@
             <a:r>
               <a:rPr sz="1000" b="0">
                 <a:solidFill>
-                  <a:srgbClr val="5A7674"/>
+                  <a:srgbClr val="33555F"/>
                 </a:solidFill>
                 <a:latin typeface="Plus Jakarta Sans"/>
               </a:rPr>
@@ -9511,11 +9511,11 @@
             </a:avLst>
           </a:prstGeom>
           <a:solidFill>
-            <a:srgbClr val="F2F8F7"/>
+            <a:srgbClr val="F0F7F8"/>
           </a:solidFill>
           <a:ln w="12700">
             <a:solidFill>
-              <a:srgbClr val="DCEAE8"/>
+              <a:srgbClr val="DCEAED"/>
             </a:solidFill>
           </a:ln>
           <a:effectLst/>
@@ -9575,7 +9575,7 @@
             <a:r>
               <a:rPr sz="1000" b="0">
                 <a:solidFill>
-                  <a:srgbClr val="5A7674"/>
+                  <a:srgbClr val="33555F"/>
                 </a:solidFill>
                 <a:latin typeface="Plus Jakarta Sans"/>
               </a:rPr>
@@ -9601,11 +9601,11 @@
             </a:avLst>
           </a:prstGeom>
           <a:solidFill>
-            <a:srgbClr val="F2F8F7"/>
+            <a:srgbClr val="F0F7F8"/>
           </a:solidFill>
           <a:ln w="12700">
             <a:solidFill>
-              <a:srgbClr val="DCEAE8"/>
+              <a:srgbClr val="DCEAED"/>
             </a:solidFill>
           </a:ln>
           <a:effectLst/>
@@ -9665,7 +9665,7 @@
             <a:r>
               <a:rPr sz="1000" b="0">
                 <a:solidFill>
-                  <a:srgbClr val="5A7674"/>
+                  <a:srgbClr val="33555F"/>
                 </a:solidFill>
                 <a:latin typeface="Plus Jakarta Sans"/>
               </a:rPr>
@@ -9691,11 +9691,11 @@
             </a:avLst>
           </a:prstGeom>
           <a:solidFill>
-            <a:srgbClr val="F2F8F7"/>
+            <a:srgbClr val="F0F7F8"/>
           </a:solidFill>
           <a:ln w="12700">
             <a:solidFill>
-              <a:srgbClr val="DCEAE8"/>
+              <a:srgbClr val="DCEAED"/>
             </a:solidFill>
           </a:ln>
           <a:effectLst/>
@@ -9755,7 +9755,7 @@
             <a:r>
               <a:rPr sz="1000" b="0">
                 <a:solidFill>
-                  <a:srgbClr val="5A7674"/>
+                  <a:srgbClr val="33555F"/>
                 </a:solidFill>
                 <a:latin typeface="Plus Jakarta Sans"/>
               </a:rPr>
@@ -9781,11 +9781,11 @@
             </a:avLst>
           </a:prstGeom>
           <a:solidFill>
-            <a:srgbClr val="F2F8F7"/>
+            <a:srgbClr val="F0F7F8"/>
           </a:solidFill>
           <a:ln w="12700">
             <a:solidFill>
-              <a:srgbClr val="DCEAE8"/>
+              <a:srgbClr val="DCEAED"/>
             </a:solidFill>
           </a:ln>
           <a:effectLst/>
@@ -9845,7 +9845,7 @@
             <a:r>
               <a:rPr sz="1000" b="0">
                 <a:solidFill>
-                  <a:srgbClr val="5A7674"/>
+                  <a:srgbClr val="33555F"/>
                 </a:solidFill>
                 <a:latin typeface="Plus Jakarta Sans"/>
               </a:rPr>
@@ -9871,11 +9871,11 @@
             </a:avLst>
           </a:prstGeom>
           <a:solidFill>
-            <a:srgbClr val="F2F8F7"/>
+            <a:srgbClr val="F0F7F8"/>
           </a:solidFill>
           <a:ln w="12700">
             <a:solidFill>
-              <a:srgbClr val="DCEAE8"/>
+              <a:srgbClr val="DCEAED"/>
             </a:solidFill>
           </a:ln>
           <a:effectLst/>
@@ -9935,7 +9935,7 @@
             <a:r>
               <a:rPr sz="1000" b="0">
                 <a:solidFill>
-                  <a:srgbClr val="5A7674"/>
+                  <a:srgbClr val="33555F"/>
                 </a:solidFill>
                 <a:latin typeface="Plus Jakarta Sans"/>
               </a:rPr>
@@ -9977,7 +9977,7 @@
             <a:r>
               <a:rPr sz="700" b="0" cap="all" spc="140">
                 <a:solidFill>
-                  <a:srgbClr val="8FA6A4"/>
+                  <a:srgbClr val="52737D"/>
                 </a:solidFill>
                 <a:latin typeface="IBM Plex Mono"/>
               </a:rPr>
@@ -10019,7 +10019,7 @@
             <a:r>
               <a:rPr sz="900" b="0">
                 <a:solidFill>
-                  <a:srgbClr val="8FA6A4"/>
+                  <a:srgbClr val="52737D"/>
                 </a:solidFill>
                 <a:latin typeface="IBM Plex Mono"/>
               </a:rPr>
@@ -10061,7 +10061,7 @@
             <a:avLst/>
           </a:prstGeom>
           <a:solidFill>
-            <a:srgbClr val="FFFFFF"/>
+            <a:srgbClr val="FBFDFE"/>
           </a:solidFill>
           <a:ln>
             <a:noFill/>
@@ -10123,7 +10123,7 @@
             <a:r>
               <a:rPr sz="1000" b="0" cap="all" spc="240">
                 <a:solidFill>
-                  <a:srgbClr val="B55615"/>
+                  <a:srgbClr val="8A6608"/>
                 </a:solidFill>
                 <a:latin typeface="IBM Plex Mono"/>
               </a:rPr>
@@ -10165,7 +10165,7 @@
             <a:r>
               <a:rPr sz="3000" b="1">
                 <a:solidFill>
-                  <a:srgbClr val="17302E"/>
+                  <a:srgbClr val="0E2830"/>
                 </a:solidFill>
                 <a:latin typeface="Outfit"/>
               </a:rPr>
@@ -10191,11 +10191,11 @@
             </a:avLst>
           </a:prstGeom>
           <a:solidFill>
-            <a:srgbClr val="0A4B49"/>
+            <a:srgbClr val="0A5F65"/>
           </a:solidFill>
           <a:ln w="12700">
             <a:solidFill>
-              <a:srgbClr val="0A4B49"/>
+              <a:srgbClr val="0A5F65"/>
             </a:solidFill>
           </a:ln>
           <a:effectLst/>
@@ -10279,7 +10279,7 @@
             <a:avLst/>
           </a:prstGeom>
           <a:solidFill>
-            <a:srgbClr val="E8823D"/>
+            <a:srgbClr val="E9B949"/>
           </a:solidFill>
           <a:ln>
             <a:noFill/>
@@ -10341,7 +10341,7 @@
             <a:r>
               <a:rPr sz="980" b="0">
                 <a:solidFill>
-                  <a:srgbClr val="D3E8E6"/>
+                  <a:srgbClr val="DCF2F3"/>
                 </a:solidFill>
                 <a:latin typeface="Plus Jakarta Sans"/>
               </a:rPr>
@@ -10365,7 +10365,7 @@
             <a:avLst/>
           </a:prstGeom>
           <a:solidFill>
-            <a:srgbClr val="E8823D"/>
+            <a:srgbClr val="E9B949"/>
           </a:solidFill>
           <a:ln>
             <a:noFill/>
@@ -10427,7 +10427,7 @@
             <a:r>
               <a:rPr sz="980" b="0">
                 <a:solidFill>
-                  <a:srgbClr val="D3E8E6"/>
+                  <a:srgbClr val="DCF2F3"/>
                 </a:solidFill>
                 <a:latin typeface="Plus Jakarta Sans"/>
               </a:rPr>
@@ -10451,7 +10451,7 @@
             <a:avLst/>
           </a:prstGeom>
           <a:solidFill>
-            <a:srgbClr val="E8823D"/>
+            <a:srgbClr val="E9B949"/>
           </a:solidFill>
           <a:ln>
             <a:noFill/>
@@ -10513,7 +10513,7 @@
             <a:r>
               <a:rPr sz="980" b="0">
                 <a:solidFill>
-                  <a:srgbClr val="D3E8E6"/>
+                  <a:srgbClr val="DCF2F3"/>
                 </a:solidFill>
                 <a:latin typeface="Plus Jakarta Sans"/>
               </a:rPr>
@@ -10537,7 +10537,7 @@
             <a:avLst/>
           </a:prstGeom>
           <a:solidFill>
-            <a:srgbClr val="E8823D"/>
+            <a:srgbClr val="E9B949"/>
           </a:solidFill>
           <a:ln>
             <a:noFill/>
@@ -10599,7 +10599,7 @@
             <a:r>
               <a:rPr sz="980" b="0">
                 <a:solidFill>
-                  <a:srgbClr val="D3E8E6"/>
+                  <a:srgbClr val="DCF2F3"/>
                 </a:solidFill>
                 <a:latin typeface="Plus Jakarta Sans"/>
               </a:rPr>
@@ -10625,11 +10625,11 @@
             </a:avLst>
           </a:prstGeom>
           <a:solidFill>
-            <a:srgbClr val="13807C"/>
+            <a:srgbClr val="0C7A80"/>
           </a:solidFill>
           <a:ln w="12700">
             <a:solidFill>
-              <a:srgbClr val="13807C"/>
+              <a:srgbClr val="0C7A80"/>
             </a:solidFill>
           </a:ln>
           <a:effectLst/>
@@ -10713,7 +10713,7 @@
             <a:avLst/>
           </a:prstGeom>
           <a:solidFill>
-            <a:srgbClr val="E8823D"/>
+            <a:srgbClr val="FFD264"/>
           </a:solidFill>
           <a:ln>
             <a:noFill/>
@@ -10799,7 +10799,7 @@
             <a:avLst/>
           </a:prstGeom>
           <a:solidFill>
-            <a:srgbClr val="E8823D"/>
+            <a:srgbClr val="FFD264"/>
           </a:solidFill>
           <a:ln>
             <a:noFill/>
@@ -10885,7 +10885,7 @@
             <a:avLst/>
           </a:prstGeom>
           <a:solidFill>
-            <a:srgbClr val="E8823D"/>
+            <a:srgbClr val="FFD264"/>
           </a:solidFill>
           <a:ln>
             <a:noFill/>
@@ -10973,11 +10973,11 @@
             </a:avLst>
           </a:prstGeom>
           <a:solidFill>
-            <a:srgbClr val="F2F8F7"/>
+            <a:srgbClr val="F0F7F8"/>
           </a:solidFill>
           <a:ln w="12700">
             <a:solidFill>
-              <a:srgbClr val="DCEAE8"/>
+              <a:srgbClr val="DCEAED"/>
             </a:solidFill>
           </a:ln>
           <a:effectLst/>
@@ -11037,7 +11037,7 @@
             <a:r>
               <a:rPr sz="1200" b="1">
                 <a:solidFill>
-                  <a:srgbClr val="17302E"/>
+                  <a:srgbClr val="0E2830"/>
                 </a:solidFill>
                 <a:latin typeface="Outfit"/>
               </a:rPr>
@@ -11061,7 +11061,7 @@
             <a:avLst/>
           </a:prstGeom>
           <a:solidFill>
-            <a:srgbClr val="0E6B68"/>
+            <a:srgbClr val="E9B949"/>
           </a:solidFill>
           <a:ln>
             <a:noFill/>
@@ -11123,7 +11123,7 @@
             <a:r>
               <a:rPr sz="980" b="0">
                 <a:solidFill>
-                  <a:srgbClr val="5A7674"/>
+                  <a:srgbClr val="33555F"/>
                 </a:solidFill>
                 <a:latin typeface="Plus Jakarta Sans"/>
               </a:rPr>
@@ -11147,7 +11147,7 @@
             <a:avLst/>
           </a:prstGeom>
           <a:solidFill>
-            <a:srgbClr val="0E6B68"/>
+            <a:srgbClr val="E9B949"/>
           </a:solidFill>
           <a:ln>
             <a:noFill/>
@@ -11209,7 +11209,7 @@
             <a:r>
               <a:rPr sz="980" b="0">
                 <a:solidFill>
-                  <a:srgbClr val="5A7674"/>
+                  <a:srgbClr val="33555F"/>
                 </a:solidFill>
                 <a:latin typeface="Plus Jakarta Sans"/>
               </a:rPr>
@@ -11233,7 +11233,7 @@
             <a:avLst/>
           </a:prstGeom>
           <a:solidFill>
-            <a:srgbClr val="0E6B68"/>
+            <a:srgbClr val="E9B949"/>
           </a:solidFill>
           <a:ln>
             <a:noFill/>
@@ -11295,7 +11295,7 @@
             <a:r>
               <a:rPr sz="980" b="0">
                 <a:solidFill>
-                  <a:srgbClr val="5A7674"/>
+                  <a:srgbClr val="33555F"/>
                 </a:solidFill>
                 <a:latin typeface="Plus Jakarta Sans"/>
               </a:rPr>
@@ -11321,11 +11321,11 @@
             </a:avLst>
           </a:prstGeom>
           <a:solidFill>
-            <a:srgbClr val="F2F8F7"/>
+            <a:srgbClr val="F0F7F8"/>
           </a:solidFill>
           <a:ln w="12700">
             <a:solidFill>
-              <a:srgbClr val="DCEAE8"/>
+              <a:srgbClr val="DCEAED"/>
             </a:solidFill>
           </a:ln>
           <a:effectLst/>
@@ -11385,7 +11385,7 @@
             <a:r>
               <a:rPr sz="1200" b="1">
                 <a:solidFill>
-                  <a:srgbClr val="17302E"/>
+                  <a:srgbClr val="0E2830"/>
                 </a:solidFill>
                 <a:latin typeface="Outfit"/>
               </a:rPr>
@@ -11409,7 +11409,7 @@
             <a:avLst/>
           </a:prstGeom>
           <a:solidFill>
-            <a:srgbClr val="0E6B68"/>
+            <a:srgbClr val="E9B949"/>
           </a:solidFill>
           <a:ln>
             <a:noFill/>
@@ -11471,7 +11471,7 @@
             <a:r>
               <a:rPr sz="980" b="0">
                 <a:solidFill>
-                  <a:srgbClr val="5A7674"/>
+                  <a:srgbClr val="33555F"/>
                 </a:solidFill>
                 <a:latin typeface="Plus Jakarta Sans"/>
               </a:rPr>
@@ -11495,7 +11495,7 @@
             <a:avLst/>
           </a:prstGeom>
           <a:solidFill>
-            <a:srgbClr val="0E6B68"/>
+            <a:srgbClr val="E9B949"/>
           </a:solidFill>
           <a:ln>
             <a:noFill/>
@@ -11557,7 +11557,7 @@
             <a:r>
               <a:rPr sz="980" b="0">
                 <a:solidFill>
-                  <a:srgbClr val="5A7674"/>
+                  <a:srgbClr val="33555F"/>
                 </a:solidFill>
                 <a:latin typeface="Plus Jakarta Sans"/>
               </a:rPr>
@@ -11599,7 +11599,7 @@
             <a:r>
               <a:rPr sz="700" b="0" cap="all" spc="140">
                 <a:solidFill>
-                  <a:srgbClr val="8FA6A4"/>
+                  <a:srgbClr val="52737D"/>
                 </a:solidFill>
                 <a:latin typeface="IBM Plex Mono"/>
               </a:rPr>
@@ -11641,7 +11641,7 @@
             <a:r>
               <a:rPr sz="900" b="0">
                 <a:solidFill>
-                  <a:srgbClr val="8FA6A4"/>
+                  <a:srgbClr val="52737D"/>
                 </a:solidFill>
                 <a:latin typeface="IBM Plex Mono"/>
               </a:rPr>
@@ -11683,7 +11683,7 @@
             <a:avLst/>
           </a:prstGeom>
           <a:solidFill>
-            <a:srgbClr val="FFFFFF"/>
+            <a:srgbClr val="FBFDFE"/>
           </a:solidFill>
           <a:ln>
             <a:noFill/>
@@ -11745,7 +11745,7 @@
             <a:r>
               <a:rPr sz="1000" b="0" cap="all" spc="240">
                 <a:solidFill>
-                  <a:srgbClr val="B55615"/>
+                  <a:srgbClr val="8A6608"/>
                 </a:solidFill>
                 <a:latin typeface="IBM Plex Mono"/>
               </a:rPr>
@@ -11787,7 +11787,7 @@
             <a:r>
               <a:rPr sz="3000" b="1">
                 <a:solidFill>
-                  <a:srgbClr val="17302E"/>
+                  <a:srgbClr val="0E2830"/>
                 </a:solidFill>
                 <a:latin typeface="Outfit"/>
               </a:rPr>
@@ -11813,11 +11813,11 @@
             </a:avLst>
           </a:prstGeom>
           <a:solidFill>
-            <a:srgbClr val="0A4B49"/>
+            <a:srgbClr val="0A5F65"/>
           </a:solidFill>
           <a:ln w="12700">
             <a:solidFill>
-              <a:srgbClr val="0A4B49"/>
+              <a:srgbClr val="0A5F65"/>
             </a:solidFill>
           </a:ln>
           <a:effectLst/>
@@ -11877,7 +11877,7 @@
             <a:r>
               <a:rPr sz="800" b="0" cap="all" spc="180">
                 <a:solidFill>
-                  <a:srgbClr val="9DC4C1"/>
+                  <a:srgbClr val="A9D6D9"/>
                 </a:solidFill>
                 <a:latin typeface="IBM Plex Mono"/>
               </a:rPr>
@@ -11943,7 +11943,7 @@
             <a:avLst/>
           </a:prstGeom>
           <a:solidFill>
-            <a:srgbClr val="E8823D"/>
+            <a:srgbClr val="E9B949"/>
           </a:solidFill>
           <a:ln>
             <a:noFill/>
@@ -12005,7 +12005,7 @@
             <a:r>
               <a:rPr sz="919" b="0">
                 <a:solidFill>
-                  <a:srgbClr val="D3E8E6"/>
+                  <a:srgbClr val="DCF2F3"/>
                 </a:solidFill>
                 <a:latin typeface="Plus Jakarta Sans"/>
               </a:rPr>
@@ -12029,7 +12029,7 @@
             <a:avLst/>
           </a:prstGeom>
           <a:solidFill>
-            <a:srgbClr val="E8823D"/>
+            <a:srgbClr val="E9B949"/>
           </a:solidFill>
           <a:ln>
             <a:noFill/>
@@ -12091,7 +12091,7 @@
             <a:r>
               <a:rPr sz="919" b="0">
                 <a:solidFill>
-                  <a:srgbClr val="D3E8E6"/>
+                  <a:srgbClr val="DCF2F3"/>
                 </a:solidFill>
                 <a:latin typeface="Plus Jakarta Sans"/>
               </a:rPr>
@@ -12115,7 +12115,7 @@
             <a:avLst/>
           </a:prstGeom>
           <a:solidFill>
-            <a:srgbClr val="E8823D"/>
+            <a:srgbClr val="E9B949"/>
           </a:solidFill>
           <a:ln>
             <a:noFill/>
@@ -12177,7 +12177,7 @@
             <a:r>
               <a:rPr sz="919" b="0">
                 <a:solidFill>
-                  <a:srgbClr val="D3E8E6"/>
+                  <a:srgbClr val="DCF2F3"/>
                 </a:solidFill>
                 <a:latin typeface="Plus Jakarta Sans"/>
               </a:rPr>
@@ -12203,11 +12203,11 @@
             </a:avLst>
           </a:prstGeom>
           <a:solidFill>
-            <a:srgbClr val="13807C"/>
+            <a:srgbClr val="0C7A80"/>
           </a:solidFill>
           <a:ln w="12700">
             <a:solidFill>
-              <a:srgbClr val="13807C"/>
+              <a:srgbClr val="0C7A80"/>
             </a:solidFill>
           </a:ln>
           <a:effectLst/>
@@ -12333,7 +12333,7 @@
             <a:avLst/>
           </a:prstGeom>
           <a:solidFill>
-            <a:srgbClr val="E8823D"/>
+            <a:srgbClr val="FFD264"/>
           </a:solidFill>
           <a:ln>
             <a:noFill/>
@@ -12419,7 +12419,7 @@
             <a:avLst/>
           </a:prstGeom>
           <a:solidFill>
-            <a:srgbClr val="E8823D"/>
+            <a:srgbClr val="FFD264"/>
           </a:solidFill>
           <a:ln>
             <a:noFill/>
@@ -12505,7 +12505,7 @@
             <a:avLst/>
           </a:prstGeom>
           <a:solidFill>
-            <a:srgbClr val="E8823D"/>
+            <a:srgbClr val="FFD264"/>
           </a:solidFill>
           <a:ln>
             <a:noFill/>
@@ -12593,11 +12593,11 @@
             </a:avLst>
           </a:prstGeom>
           <a:solidFill>
-            <a:srgbClr val="FBDCE6"/>
+            <a:srgbClr val="FCE2F0"/>
           </a:solidFill>
           <a:ln w="12700">
             <a:solidFill>
-              <a:srgbClr val="E85C82"/>
+              <a:srgbClr val="F49CCB"/>
             </a:solidFill>
           </a:ln>
           <a:effectLst/>
@@ -12657,7 +12657,7 @@
             <a:r>
               <a:rPr sz="800" b="0" cap="all" spc="180">
                 <a:solidFill>
-                  <a:srgbClr val="C11B48"/>
+                  <a:srgbClr val="C10073"/>
                 </a:solidFill>
                 <a:latin typeface="IBM Plex Mono"/>
               </a:rPr>
@@ -12699,7 +12699,7 @@
             <a:r>
               <a:rPr sz="1150" b="1">
                 <a:solidFill>
-                  <a:srgbClr val="17302E"/>
+                  <a:srgbClr val="0E2830"/>
                 </a:solidFill>
                 <a:latin typeface="Outfit"/>
               </a:rPr>
@@ -12723,7 +12723,7 @@
             <a:avLst/>
           </a:prstGeom>
           <a:solidFill>
-            <a:srgbClr val="E85C82"/>
+            <a:srgbClr val="EC008C"/>
           </a:solidFill>
           <a:ln>
             <a:noFill/>
@@ -12785,7 +12785,7 @@
             <a:r>
               <a:rPr sz="919" b="0">
                 <a:solidFill>
-                  <a:srgbClr val="17302E"/>
+                  <a:srgbClr val="33555F"/>
                 </a:solidFill>
                 <a:latin typeface="Plus Jakarta Sans"/>
               </a:rPr>
@@ -12809,7 +12809,7 @@
             <a:avLst/>
           </a:prstGeom>
           <a:solidFill>
-            <a:srgbClr val="E85C82"/>
+            <a:srgbClr val="EC008C"/>
           </a:solidFill>
           <a:ln>
             <a:noFill/>
@@ -12871,7 +12871,7 @@
             <a:r>
               <a:rPr sz="919" b="0">
                 <a:solidFill>
-                  <a:srgbClr val="17302E"/>
+                  <a:srgbClr val="33555F"/>
                 </a:solidFill>
                 <a:latin typeface="Plus Jakarta Sans"/>
               </a:rPr>
@@ -12895,7 +12895,7 @@
             <a:avLst/>
           </a:prstGeom>
           <a:solidFill>
-            <a:srgbClr val="E85C82"/>
+            <a:srgbClr val="EC008C"/>
           </a:solidFill>
           <a:ln>
             <a:noFill/>
@@ -12957,7 +12957,7 @@
             <a:r>
               <a:rPr sz="919" b="0">
                 <a:solidFill>
-                  <a:srgbClr val="17302E"/>
+                  <a:srgbClr val="33555F"/>
                 </a:solidFill>
                 <a:latin typeface="Plus Jakarta Sans"/>
               </a:rPr>
@@ -12983,11 +12983,11 @@
             </a:avLst>
           </a:prstGeom>
           <a:solidFill>
-            <a:srgbClr val="E8823D"/>
+            <a:srgbClr val="FBF1D6"/>
           </a:solidFill>
           <a:ln w="12700">
             <a:solidFill>
-              <a:srgbClr val="E8823D"/>
+              <a:srgbClr val="D8AE55"/>
             </a:solidFill>
           </a:ln>
           <a:effectLst/>
@@ -13047,7 +13047,7 @@
             <a:r>
               <a:rPr sz="800" b="0" cap="all" spc="180">
                 <a:solidFill>
-                  <a:srgbClr val="451F04"/>
+                  <a:srgbClr val="8A6608"/>
                 </a:solidFill>
                 <a:latin typeface="IBM Plex Mono"/>
               </a:rPr>
@@ -13089,7 +13089,7 @@
             <a:r>
               <a:rPr sz="1150" b="1">
                 <a:solidFill>
-                  <a:srgbClr val="17302E"/>
+                  <a:srgbClr val="0E2830"/>
                 </a:solidFill>
                 <a:latin typeface="Outfit"/>
               </a:rPr>
@@ -13113,7 +13113,7 @@
             <a:avLst/>
           </a:prstGeom>
           <a:solidFill>
-            <a:srgbClr val="17302E"/>
+            <a:srgbClr val="E9B949"/>
           </a:solidFill>
           <a:ln>
             <a:noFill/>
@@ -13175,7 +13175,7 @@
             <a:r>
               <a:rPr sz="919" b="0">
                 <a:solidFill>
-                  <a:srgbClr val="17302E"/>
+                  <a:srgbClr val="33555F"/>
                 </a:solidFill>
                 <a:latin typeface="Plus Jakarta Sans"/>
               </a:rPr>
@@ -13199,7 +13199,7 @@
             <a:avLst/>
           </a:prstGeom>
           <a:solidFill>
-            <a:srgbClr val="17302E"/>
+            <a:srgbClr val="E9B949"/>
           </a:solidFill>
           <a:ln>
             <a:noFill/>
@@ -13261,7 +13261,7 @@
             <a:r>
               <a:rPr sz="919" b="0">
                 <a:solidFill>
-                  <a:srgbClr val="17302E"/>
+                  <a:srgbClr val="33555F"/>
                 </a:solidFill>
                 <a:latin typeface="Plus Jakarta Sans"/>
               </a:rPr>
@@ -13285,7 +13285,7 @@
             <a:avLst/>
           </a:prstGeom>
           <a:solidFill>
-            <a:srgbClr val="17302E"/>
+            <a:srgbClr val="E9B949"/>
           </a:solidFill>
           <a:ln>
             <a:noFill/>
@@ -13347,7 +13347,7 @@
             <a:r>
               <a:rPr sz="919" b="0">
                 <a:solidFill>
-                  <a:srgbClr val="17302E"/>
+                  <a:srgbClr val="33555F"/>
                 </a:solidFill>
                 <a:latin typeface="Plus Jakarta Sans"/>
               </a:rPr>
@@ -13389,7 +13389,7 @@
             <a:r>
               <a:rPr sz="700" b="0" cap="all" spc="140">
                 <a:solidFill>
-                  <a:srgbClr val="8FA6A4"/>
+                  <a:srgbClr val="52737D"/>
                 </a:solidFill>
                 <a:latin typeface="IBM Plex Mono"/>
               </a:rPr>
@@ -13431,7 +13431,7 @@
             <a:r>
               <a:rPr sz="900" b="0">
                 <a:solidFill>
-                  <a:srgbClr val="8FA6A4"/>
+                  <a:srgbClr val="52737D"/>
                 </a:solidFill>
                 <a:latin typeface="IBM Plex Mono"/>
               </a:rPr>
@@ -13473,7 +13473,7 @@
             <a:avLst/>
           </a:prstGeom>
           <a:solidFill>
-            <a:srgbClr val="0A4B49"/>
+            <a:srgbClr val="0A5F65"/>
           </a:solidFill>
           <a:ln>
             <a:noFill/>
@@ -13559,7 +13559,7 @@
             <a:r>
               <a:rPr sz="1050" b="0" cap="all" spc="260">
                 <a:solidFill>
-                  <a:srgbClr val="ED9D67"/>
+                  <a:srgbClr val="FFD264"/>
                 </a:solidFill>
                 <a:latin typeface="IBM Plex Mono"/>
               </a:rPr>
@@ -13601,7 +13601,7 @@
             <a:r>
               <a:rPr sz="4400" b="1">
                 <a:solidFill>
-                  <a:srgbClr val="E8823D"/>
+                  <a:srgbClr val="FFD264"/>
                 </a:solidFill>
                 <a:latin typeface="Outfit"/>
               </a:rPr>
@@ -13643,7 +13643,7 @@
             <a:r>
               <a:rPr sz="1150" b="0">
                 <a:solidFill>
-                  <a:srgbClr val="D3E8E6"/>
+                  <a:srgbClr val="DCF2F3"/>
                 </a:solidFill>
                 <a:latin typeface="Plus Jakarta Sans"/>
               </a:rPr>
@@ -13669,11 +13669,11 @@
             </a:avLst>
           </a:prstGeom>
           <a:solidFill>
-            <a:srgbClr val="13807C"/>
+            <a:srgbClr val="0C7A80"/>
           </a:solidFill>
           <a:ln w="12700">
             <a:solidFill>
-              <a:srgbClr val="13807C"/>
+              <a:srgbClr val="0C7A80"/>
             </a:solidFill>
           </a:ln>
           <a:effectLst/>
@@ -13776,7 +13776,7 @@
             <a:avLst/>
           </a:prstGeom>
           <a:solidFill>
-            <a:srgbClr val="2E7E7A"/>
+            <a:srgbClr val="2E8A90"/>
           </a:solidFill>
           <a:ln>
             <a:noFill/>
@@ -13862,7 +13862,7 @@
             <a:r>
               <a:rPr sz="800" b="0" cap="all" spc="180">
                 <a:solidFill>
-                  <a:srgbClr val="9DC4C1"/>
+                  <a:srgbClr val="A9D6D9"/>
                 </a:solidFill>
                 <a:latin typeface="IBM Plex Mono"/>
               </a:rPr>
@@ -13952,7 +13952,7 @@
             <a:r>
               <a:rPr sz="750" b="0" cap="all" spc="160">
                 <a:solidFill>
-                  <a:srgbClr val="9DC4C1"/>
+                  <a:srgbClr val="A9D6D9"/>
                 </a:solidFill>
                 <a:latin typeface="IBM Plex Mono"/>
               </a:rPr>
@@ -13994,7 +13994,7 @@
             <a:r>
               <a:rPr sz="900" b="0">
                 <a:solidFill>
-                  <a:srgbClr val="8FA6A4"/>
+                  <a:srgbClr val="A9D6D9"/>
                 </a:solidFill>
                 <a:latin typeface="IBM Plex Mono"/>
               </a:rPr>
@@ -14036,7 +14036,7 @@
             <a:avLst/>
           </a:prstGeom>
           <a:solidFill>
-            <a:srgbClr val="FFFFFF"/>
+            <a:srgbClr val="FBFDFE"/>
           </a:solidFill>
           <a:ln>
             <a:noFill/>
@@ -14098,7 +14098,7 @@
             <a:r>
               <a:rPr sz="1000" b="0" cap="all" spc="240">
                 <a:solidFill>
-                  <a:srgbClr val="B55615"/>
+                  <a:srgbClr val="8A6608"/>
                 </a:solidFill>
                 <a:latin typeface="IBM Plex Mono"/>
               </a:rPr>
@@ -14140,7 +14140,7 @@
             <a:r>
               <a:rPr sz="3000" b="1">
                 <a:solidFill>
-                  <a:srgbClr val="17302E"/>
+                  <a:srgbClr val="0E2830"/>
                 </a:solidFill>
                 <a:latin typeface="Outfit"/>
               </a:rPr>
@@ -14182,7 +14182,7 @@
             <a:r>
               <a:rPr sz="1200" b="0">
                 <a:solidFill>
-                  <a:srgbClr val="5A7674"/>
+                  <a:srgbClr val="52737D"/>
                 </a:solidFill>
                 <a:latin typeface="Plus Jakarta Sans"/>
               </a:rPr>
@@ -14208,11 +14208,11 @@
             </a:avLst>
           </a:prstGeom>
           <a:solidFill>
-            <a:srgbClr val="F2F8F7"/>
+            <a:srgbClr val="F0F7F8"/>
           </a:solidFill>
           <a:ln w="12700">
             <a:solidFill>
-              <a:srgbClr val="DCEAE8"/>
+              <a:srgbClr val="DCEAED"/>
             </a:solidFill>
           </a:ln>
           <a:effectLst/>
@@ -14272,7 +14272,7 @@
             <a:r>
               <a:rPr sz="800" b="0" cap="all" spc="180">
                 <a:solidFill>
-                  <a:srgbClr val="5D7573"/>
+                  <a:srgbClr val="52737D"/>
                 </a:solidFill>
                 <a:latin typeface="IBM Plex Mono"/>
               </a:rPr>
@@ -14291,7 +14291,7 @@
             <a:r>
               <a:rPr sz="1350" b="1">
                 <a:solidFill>
-                  <a:srgbClr val="17302E"/>
+                  <a:srgbClr val="0E2830"/>
                 </a:solidFill>
                 <a:latin typeface="Outfit"/>
               </a:rPr>
@@ -14310,7 +14310,7 @@
             <a:r>
               <a:rPr sz="1050" b="0">
                 <a:solidFill>
-                  <a:srgbClr val="5A7674"/>
+                  <a:srgbClr val="33555F"/>
                 </a:solidFill>
                 <a:latin typeface="Plus Jakarta Sans"/>
               </a:rPr>
@@ -14336,11 +14336,11 @@
             </a:avLst>
           </a:prstGeom>
           <a:solidFill>
-            <a:srgbClr val="F2F8F7"/>
+            <a:srgbClr val="F0F7F8"/>
           </a:solidFill>
           <a:ln w="12700">
             <a:solidFill>
-              <a:srgbClr val="DCEAE8"/>
+              <a:srgbClr val="DCEAED"/>
             </a:solidFill>
           </a:ln>
           <a:effectLst/>
@@ -14400,7 +14400,7 @@
             <a:r>
               <a:rPr sz="800" b="0" cap="all" spc="180">
                 <a:solidFill>
-                  <a:srgbClr val="5D7573"/>
+                  <a:srgbClr val="52737D"/>
                 </a:solidFill>
                 <a:latin typeface="IBM Plex Mono"/>
               </a:rPr>
@@ -14419,7 +14419,7 @@
             <a:r>
               <a:rPr sz="1350" b="1">
                 <a:solidFill>
-                  <a:srgbClr val="17302E"/>
+                  <a:srgbClr val="0E2830"/>
                 </a:solidFill>
                 <a:latin typeface="Outfit"/>
               </a:rPr>
@@ -14438,7 +14438,7 @@
             <a:r>
               <a:rPr sz="1050" b="0">
                 <a:solidFill>
-                  <a:srgbClr val="5A7674"/>
+                  <a:srgbClr val="33555F"/>
                 </a:solidFill>
                 <a:latin typeface="Plus Jakarta Sans"/>
               </a:rPr>
@@ -14464,11 +14464,11 @@
             </a:avLst>
           </a:prstGeom>
           <a:solidFill>
-            <a:srgbClr val="F2F8F7"/>
+            <a:srgbClr val="F0F7F8"/>
           </a:solidFill>
           <a:ln w="12700">
             <a:solidFill>
-              <a:srgbClr val="DCEAE8"/>
+              <a:srgbClr val="DCEAED"/>
             </a:solidFill>
           </a:ln>
           <a:effectLst/>
@@ -14528,7 +14528,7 @@
             <a:r>
               <a:rPr sz="800" b="0" cap="all" spc="180">
                 <a:solidFill>
-                  <a:srgbClr val="5D7573"/>
+                  <a:srgbClr val="52737D"/>
                 </a:solidFill>
                 <a:latin typeface="IBM Plex Mono"/>
               </a:rPr>
@@ -14547,7 +14547,7 @@
             <a:r>
               <a:rPr sz="1350" b="1">
                 <a:solidFill>
-                  <a:srgbClr val="17302E"/>
+                  <a:srgbClr val="0E2830"/>
                 </a:solidFill>
                 <a:latin typeface="Outfit"/>
               </a:rPr>
@@ -14566,7 +14566,7 @@
             <a:r>
               <a:rPr sz="1050" b="0">
                 <a:solidFill>
-                  <a:srgbClr val="5A7674"/>
+                  <a:srgbClr val="33555F"/>
                 </a:solidFill>
                 <a:latin typeface="Plus Jakarta Sans"/>
               </a:rPr>
@@ -14592,11 +14592,11 @@
             </a:avLst>
           </a:prstGeom>
           <a:solidFill>
-            <a:srgbClr val="F2F8F7"/>
+            <a:srgbClr val="F0F7F8"/>
           </a:solidFill>
           <a:ln w="12700">
             <a:solidFill>
-              <a:srgbClr val="DCEAE8"/>
+              <a:srgbClr val="DCEAED"/>
             </a:solidFill>
           </a:ln>
           <a:effectLst/>
@@ -14656,7 +14656,7 @@
             <a:r>
               <a:rPr sz="800" b="0" cap="all" spc="180">
                 <a:solidFill>
-                  <a:srgbClr val="5D7573"/>
+                  <a:srgbClr val="52737D"/>
                 </a:solidFill>
                 <a:latin typeface="IBM Plex Mono"/>
               </a:rPr>
@@ -14675,7 +14675,7 @@
             <a:r>
               <a:rPr sz="1350" b="1">
                 <a:solidFill>
-                  <a:srgbClr val="17302E"/>
+                  <a:srgbClr val="0E2830"/>
                 </a:solidFill>
                 <a:latin typeface="Outfit"/>
               </a:rPr>
@@ -14694,7 +14694,7 @@
             <a:r>
               <a:rPr sz="1050" b="0">
                 <a:solidFill>
-                  <a:srgbClr val="5A7674"/>
+                  <a:srgbClr val="33555F"/>
                 </a:solidFill>
                 <a:latin typeface="Plus Jakarta Sans"/>
               </a:rPr>
@@ -14736,7 +14736,7 @@
             <a:r>
               <a:rPr sz="700" b="0" cap="all" spc="140">
                 <a:solidFill>
-                  <a:srgbClr val="8FA6A4"/>
+                  <a:srgbClr val="52737D"/>
                 </a:solidFill>
                 <a:latin typeface="IBM Plex Mono"/>
               </a:rPr>
@@ -14778,7 +14778,7 @@
             <a:r>
               <a:rPr sz="900" b="0">
                 <a:solidFill>
-                  <a:srgbClr val="8FA6A4"/>
+                  <a:srgbClr val="52737D"/>
                 </a:solidFill>
                 <a:latin typeface="IBM Plex Mono"/>
               </a:rPr>
@@ -14820,7 +14820,7 @@
             <a:avLst/>
           </a:prstGeom>
           <a:solidFill>
-            <a:srgbClr val="FFFFFF"/>
+            <a:srgbClr val="FBFDFE"/>
           </a:solidFill>
           <a:ln>
             <a:noFill/>
@@ -14882,7 +14882,7 @@
             <a:r>
               <a:rPr sz="1000" b="0" cap="all" spc="240">
                 <a:solidFill>
-                  <a:srgbClr val="B55615"/>
+                  <a:srgbClr val="8A6608"/>
                 </a:solidFill>
                 <a:latin typeface="IBM Plex Mono"/>
               </a:rPr>
@@ -14924,7 +14924,7 @@
             <a:r>
               <a:rPr sz="3000" b="1">
                 <a:solidFill>
-                  <a:srgbClr val="17302E"/>
+                  <a:srgbClr val="0E2830"/>
                 </a:solidFill>
                 <a:latin typeface="Outfit"/>
               </a:rPr>
@@ -14948,7 +14948,7 @@
             <a:avLst/>
           </a:prstGeom>
           <a:solidFill>
-            <a:srgbClr val="0E6B68"/>
+            <a:srgbClr val="E9B949"/>
           </a:solidFill>
           <a:ln>
             <a:noFill/>
@@ -15010,7 +15010,7 @@
             <a:r>
               <a:rPr sz="1050" b="0">
                 <a:solidFill>
-                  <a:srgbClr val="5A7674"/>
+                  <a:srgbClr val="33555F"/>
                 </a:solidFill>
                 <a:latin typeface="Plus Jakarta Sans"/>
               </a:rPr>
@@ -15034,7 +15034,7 @@
             <a:avLst/>
           </a:prstGeom>
           <a:solidFill>
-            <a:srgbClr val="0E6B68"/>
+            <a:srgbClr val="E9B949"/>
           </a:solidFill>
           <a:ln>
             <a:noFill/>
@@ -15096,7 +15096,7 @@
             <a:r>
               <a:rPr sz="1050" b="0">
                 <a:solidFill>
-                  <a:srgbClr val="5A7674"/>
+                  <a:srgbClr val="33555F"/>
                 </a:solidFill>
                 <a:latin typeface="Plus Jakarta Sans"/>
               </a:rPr>
@@ -15120,7 +15120,7 @@
             <a:avLst/>
           </a:prstGeom>
           <a:solidFill>
-            <a:srgbClr val="0E6B68"/>
+            <a:srgbClr val="E9B949"/>
           </a:solidFill>
           <a:ln>
             <a:noFill/>
@@ -15182,7 +15182,7 @@
             <a:r>
               <a:rPr sz="1050" b="0">
                 <a:solidFill>
-                  <a:srgbClr val="5A7674"/>
+                  <a:srgbClr val="33555F"/>
                 </a:solidFill>
                 <a:latin typeface="Plus Jakarta Sans"/>
               </a:rPr>
@@ -15206,7 +15206,7 @@
             <a:avLst/>
           </a:prstGeom>
           <a:solidFill>
-            <a:srgbClr val="0E6B68"/>
+            <a:srgbClr val="E9B949"/>
           </a:solidFill>
           <a:ln>
             <a:noFill/>
@@ -15268,7 +15268,7 @@
             <a:r>
               <a:rPr sz="1050" b="0">
                 <a:solidFill>
-                  <a:srgbClr val="5A7674"/>
+                  <a:srgbClr val="33555F"/>
                 </a:solidFill>
                 <a:latin typeface="Plus Jakarta Sans"/>
               </a:rPr>
@@ -15294,11 +15294,11 @@
             </a:avLst>
           </a:prstGeom>
           <a:solidFill>
-            <a:srgbClr val="0A4B49"/>
+            <a:srgbClr val="0A5F65"/>
           </a:solidFill>
           <a:ln w="12700">
             <a:solidFill>
-              <a:srgbClr val="0A4B49"/>
+              <a:srgbClr val="0A5F65"/>
             </a:solidFill>
           </a:ln>
           <a:effectLst/>
@@ -15358,7 +15358,7 @@
             <a:r>
               <a:rPr sz="800" b="0" cap="all" spc="180">
                 <a:solidFill>
-                  <a:srgbClr val="9DC4C1"/>
+                  <a:srgbClr val="A9D6D9"/>
                 </a:solidFill>
                 <a:latin typeface="IBM Plex Mono"/>
               </a:rPr>
@@ -15383,7 +15383,7 @@
           </a:prstGeom>
           <a:ln w="25400">
             <a:solidFill>
-              <a:srgbClr val="E8823D"/>
+              <a:srgbClr val="FFD264"/>
             </a:solidFill>
           </a:ln>
         </p:spPr>
@@ -15418,7 +15418,7 @@
           </a:prstGeom>
           <a:ln w="25400">
             <a:solidFill>
-              <a:srgbClr val="E85C82"/>
+              <a:srgbClr val="FFB3E0"/>
             </a:solidFill>
           </a:ln>
         </p:spPr>
@@ -15452,7 +15452,7 @@
             <a:avLst/>
           </a:prstGeom>
           <a:solidFill>
-            <a:srgbClr val="0A4B49"/>
+            <a:srgbClr val="0A5F65"/>
           </a:solidFill>
           <a:ln w="25400">
             <a:solidFill>
@@ -15535,7 +15535,7 @@
             <a:r>
               <a:rPr sz="700" b="0" cap="all" spc="110">
                 <a:solidFill>
-                  <a:srgbClr val="9DC4C1"/>
+                  <a:srgbClr val="DCF2F3"/>
                 </a:solidFill>
                 <a:latin typeface="IBM Plex Mono"/>
               </a:rPr>
@@ -15559,11 +15559,11 @@
             <a:avLst/>
           </a:prstGeom>
           <a:solidFill>
-            <a:srgbClr val="0A4B49"/>
+            <a:srgbClr val="0A5F65"/>
           </a:solidFill>
           <a:ln w="25400">
             <a:solidFill>
-              <a:srgbClr val="E8823D"/>
+              <a:srgbClr val="FFD264"/>
             </a:solidFill>
           </a:ln>
           <a:effectLst/>
@@ -15623,7 +15623,7 @@
             <a:r>
               <a:rPr sz="1200" b="1">
                 <a:solidFill>
-                  <a:srgbClr val="E8823D"/>
+                  <a:srgbClr val="FFD264"/>
                 </a:solidFill>
                 <a:latin typeface="Outfit"/>
               </a:rPr>
@@ -15642,7 +15642,7 @@
             <a:r>
               <a:rPr sz="700" b="0" cap="all" spc="110">
                 <a:solidFill>
-                  <a:srgbClr val="9DC4C1"/>
+                  <a:srgbClr val="DCF2F3"/>
                 </a:solidFill>
                 <a:latin typeface="IBM Plex Mono"/>
               </a:rPr>
@@ -15666,11 +15666,11 @@
             <a:avLst/>
           </a:prstGeom>
           <a:solidFill>
-            <a:srgbClr val="0A4B49"/>
+            <a:srgbClr val="0A5F65"/>
           </a:solidFill>
           <a:ln w="25400">
             <a:solidFill>
-              <a:srgbClr val="E85C82"/>
+              <a:srgbClr val="FFB3E0"/>
             </a:solidFill>
           </a:ln>
           <a:effectLst/>
@@ -15730,7 +15730,7 @@
             <a:r>
               <a:rPr sz="1200" b="1">
                 <a:solidFill>
-                  <a:srgbClr val="E85C82"/>
+                  <a:srgbClr val="FFB3E0"/>
                 </a:solidFill>
                 <a:latin typeface="Outfit"/>
               </a:rPr>
@@ -15749,7 +15749,7 @@
             <a:r>
               <a:rPr sz="700" b="0" cap="all" spc="110">
                 <a:solidFill>
-                  <a:srgbClr val="9DC4C1"/>
+                  <a:srgbClr val="DCF2F3"/>
                 </a:solidFill>
                 <a:latin typeface="IBM Plex Mono"/>
               </a:rPr>
@@ -15775,11 +15775,11 @@
             </a:avLst>
           </a:prstGeom>
           <a:solidFill>
-            <a:srgbClr val="13807C"/>
+            <a:srgbClr val="0C7A80"/>
           </a:solidFill>
           <a:ln w="12700">
             <a:solidFill>
-              <a:srgbClr val="13807C"/>
+              <a:srgbClr val="0C7A80"/>
             </a:solidFill>
           </a:ln>
           <a:effectLst/>
@@ -15903,11 +15903,11 @@
             </a:avLst>
           </a:prstGeom>
           <a:solidFill>
-            <a:srgbClr val="13807C"/>
+            <a:srgbClr val="0C7A80"/>
           </a:solidFill>
           <a:ln w="12700">
             <a:solidFill>
-              <a:srgbClr val="13807C"/>
+              <a:srgbClr val="0C7A80"/>
             </a:solidFill>
           </a:ln>
           <a:effectLst/>
@@ -16047,7 +16047,7 @@
             <a:r>
               <a:rPr sz="700" b="0" cap="all" spc="140">
                 <a:solidFill>
-                  <a:srgbClr val="8FA6A4"/>
+                  <a:srgbClr val="52737D"/>
                 </a:solidFill>
                 <a:latin typeface="IBM Plex Mono"/>
               </a:rPr>
@@ -16089,7 +16089,7 @@
             <a:r>
               <a:rPr sz="900" b="0">
                 <a:solidFill>
-                  <a:srgbClr val="8FA6A4"/>
+                  <a:srgbClr val="52737D"/>
                 </a:solidFill>
                 <a:latin typeface="IBM Plex Mono"/>
               </a:rPr>
@@ -16131,7 +16131,7 @@
             <a:avLst/>
           </a:prstGeom>
           <a:solidFill>
-            <a:srgbClr val="FFFFFF"/>
+            <a:srgbClr val="FBFDFE"/>
           </a:solidFill>
           <a:ln>
             <a:noFill/>
@@ -16193,7 +16193,7 @@
             <a:r>
               <a:rPr sz="1000" b="0" cap="all" spc="240">
                 <a:solidFill>
-                  <a:srgbClr val="B55615"/>
+                  <a:srgbClr val="8A6608"/>
                 </a:solidFill>
                 <a:latin typeface="IBM Plex Mono"/>
               </a:rPr>
@@ -16235,7 +16235,7 @@
             <a:r>
               <a:rPr sz="3000" b="1">
                 <a:solidFill>
-                  <a:srgbClr val="17302E"/>
+                  <a:srgbClr val="0E2830"/>
                 </a:solidFill>
                 <a:latin typeface="Outfit"/>
               </a:rPr>
@@ -16261,11 +16261,11 @@
             </a:avLst>
           </a:prstGeom>
           <a:solidFill>
-            <a:srgbClr val="F2F8F7"/>
+            <a:srgbClr val="F0F7F8"/>
           </a:solidFill>
           <a:ln w="12700">
             <a:solidFill>
-              <a:srgbClr val="DCEAE8"/>
+              <a:srgbClr val="DCEAED"/>
             </a:solidFill>
           </a:ln>
           <a:effectLst/>
@@ -16325,7 +16325,7 @@
             <a:r>
               <a:rPr sz="1150" b="1">
                 <a:solidFill>
-                  <a:srgbClr val="17302E"/>
+                  <a:srgbClr val="0E2830"/>
                 </a:solidFill>
                 <a:latin typeface="Outfit"/>
               </a:rPr>
@@ -16344,7 +16344,7 @@
             <a:r>
               <a:rPr sz="950" b="0">
                 <a:solidFill>
-                  <a:srgbClr val="5A7674"/>
+                  <a:srgbClr val="33555F"/>
                 </a:solidFill>
                 <a:latin typeface="Plus Jakarta Sans"/>
               </a:rPr>
@@ -16370,11 +16370,11 @@
             </a:avLst>
           </a:prstGeom>
           <a:solidFill>
-            <a:srgbClr val="F2F8F7"/>
+            <a:srgbClr val="F0F7F8"/>
           </a:solidFill>
           <a:ln w="12700">
             <a:solidFill>
-              <a:srgbClr val="DCEAE8"/>
+              <a:srgbClr val="DCEAED"/>
             </a:solidFill>
           </a:ln>
           <a:effectLst/>
@@ -16434,7 +16434,7 @@
             <a:r>
               <a:rPr sz="1150" b="1">
                 <a:solidFill>
-                  <a:srgbClr val="17302E"/>
+                  <a:srgbClr val="0E2830"/>
                 </a:solidFill>
                 <a:latin typeface="Outfit"/>
               </a:rPr>
@@ -16453,7 +16453,7 @@
             <a:r>
               <a:rPr sz="950" b="0">
                 <a:solidFill>
-                  <a:srgbClr val="5A7674"/>
+                  <a:srgbClr val="33555F"/>
                 </a:solidFill>
                 <a:latin typeface="Plus Jakarta Sans"/>
               </a:rPr>
@@ -16479,11 +16479,11 @@
             </a:avLst>
           </a:prstGeom>
           <a:solidFill>
-            <a:srgbClr val="F2F8F7"/>
+            <a:srgbClr val="F0F7F8"/>
           </a:solidFill>
           <a:ln w="12700">
             <a:solidFill>
-              <a:srgbClr val="DCEAE8"/>
+              <a:srgbClr val="DCEAED"/>
             </a:solidFill>
           </a:ln>
           <a:effectLst/>
@@ -16543,7 +16543,7 @@
             <a:r>
               <a:rPr sz="1150" b="1">
                 <a:solidFill>
-                  <a:srgbClr val="17302E"/>
+                  <a:srgbClr val="0E2830"/>
                 </a:solidFill>
                 <a:latin typeface="Outfit"/>
               </a:rPr>
@@ -16562,7 +16562,7 @@
             <a:r>
               <a:rPr sz="950" b="0">
                 <a:solidFill>
-                  <a:srgbClr val="5A7674"/>
+                  <a:srgbClr val="33555F"/>
                 </a:solidFill>
                 <a:latin typeface="Plus Jakarta Sans"/>
               </a:rPr>
@@ -16588,11 +16588,11 @@
             </a:avLst>
           </a:prstGeom>
           <a:solidFill>
-            <a:srgbClr val="FBDCE6"/>
+            <a:srgbClr val="FCE2F0"/>
           </a:solidFill>
           <a:ln w="12700">
             <a:solidFill>
-              <a:srgbClr val="E85C82"/>
+              <a:srgbClr val="F49CCB"/>
             </a:solidFill>
           </a:ln>
           <a:effectLst/>
@@ -16652,7 +16652,7 @@
             <a:r>
               <a:rPr sz="1150" b="1">
                 <a:solidFill>
-                  <a:srgbClr val="17302E"/>
+                  <a:srgbClr val="0E2830"/>
                 </a:solidFill>
                 <a:latin typeface="Outfit"/>
               </a:rPr>
@@ -16671,7 +16671,7 @@
             <a:r>
               <a:rPr sz="950" b="0">
                 <a:solidFill>
-                  <a:srgbClr val="17302E"/>
+                  <a:srgbClr val="33555F"/>
                 </a:solidFill>
                 <a:latin typeface="Plus Jakarta Sans"/>
               </a:rPr>
@@ -16697,11 +16697,11 @@
             </a:avLst>
           </a:prstGeom>
           <a:solidFill>
-            <a:srgbClr val="FBDCE6"/>
+            <a:srgbClr val="FCE2F0"/>
           </a:solidFill>
           <a:ln w="12700">
             <a:solidFill>
-              <a:srgbClr val="E85C82"/>
+              <a:srgbClr val="F49CCB"/>
             </a:solidFill>
           </a:ln>
           <a:effectLst/>
@@ -16761,7 +16761,7 @@
             <a:r>
               <a:rPr sz="1150" b="1">
                 <a:solidFill>
-                  <a:srgbClr val="17302E"/>
+                  <a:srgbClr val="0E2830"/>
                 </a:solidFill>
                 <a:latin typeface="Outfit"/>
               </a:rPr>
@@ -16780,7 +16780,7 @@
             <a:r>
               <a:rPr sz="950" b="0">
                 <a:solidFill>
-                  <a:srgbClr val="17302E"/>
+                  <a:srgbClr val="33555F"/>
                 </a:solidFill>
                 <a:latin typeface="Plus Jakarta Sans"/>
               </a:rPr>
@@ -16822,7 +16822,7 @@
             <a:r>
               <a:rPr sz="700" b="0" cap="all" spc="140">
                 <a:solidFill>
-                  <a:srgbClr val="8FA6A4"/>
+                  <a:srgbClr val="52737D"/>
                 </a:solidFill>
                 <a:latin typeface="IBM Plex Mono"/>
               </a:rPr>
@@ -16864,7 +16864,7 @@
             <a:r>
               <a:rPr sz="900" b="0">
                 <a:solidFill>
-                  <a:srgbClr val="8FA6A4"/>
+                  <a:srgbClr val="52737D"/>
                 </a:solidFill>
                 <a:latin typeface="IBM Plex Mono"/>
               </a:rPr>
@@ -16906,7 +16906,7 @@
             <a:avLst/>
           </a:prstGeom>
           <a:solidFill>
-            <a:srgbClr val="FFFFFF"/>
+            <a:srgbClr val="FBFDFE"/>
           </a:solidFill>
           <a:ln>
             <a:noFill/>
@@ -16968,7 +16968,7 @@
             <a:r>
               <a:rPr sz="1000" b="0" cap="all" spc="240">
                 <a:solidFill>
-                  <a:srgbClr val="B55615"/>
+                  <a:srgbClr val="8A6608"/>
                 </a:solidFill>
                 <a:latin typeface="IBM Plex Mono"/>
               </a:rPr>
@@ -17010,7 +17010,7 @@
             <a:r>
               <a:rPr sz="3000" b="1">
                 <a:solidFill>
-                  <a:srgbClr val="17302E"/>
+                  <a:srgbClr val="0E2830"/>
                 </a:solidFill>
                 <a:latin typeface="Outfit"/>
               </a:rPr>
@@ -17036,11 +17036,11 @@
             </a:avLst>
           </a:prstGeom>
           <a:solidFill>
-            <a:srgbClr val="F2F8F7"/>
+            <a:srgbClr val="F0F7F8"/>
           </a:solidFill>
           <a:ln w="12700">
             <a:solidFill>
-              <a:srgbClr val="DCEAE8"/>
+              <a:srgbClr val="DCEAED"/>
             </a:solidFill>
           </a:ln>
           <a:effectLst/>
@@ -17100,7 +17100,7 @@
             <a:r>
               <a:rPr sz="1100" b="1">
                 <a:solidFill>
-                  <a:srgbClr val="17302E"/>
+                  <a:srgbClr val="0E2830"/>
                 </a:solidFill>
                 <a:latin typeface="Outfit"/>
               </a:rPr>
@@ -17119,7 +17119,7 @@
             <a:r>
               <a:rPr sz="919" b="0">
                 <a:solidFill>
-                  <a:srgbClr val="5A7674"/>
+                  <a:srgbClr val="33555F"/>
                 </a:solidFill>
                 <a:latin typeface="Plus Jakarta Sans"/>
               </a:rPr>
@@ -17145,11 +17145,11 @@
             </a:avLst>
           </a:prstGeom>
           <a:solidFill>
-            <a:srgbClr val="F2F8F7"/>
+            <a:srgbClr val="F0F7F8"/>
           </a:solidFill>
           <a:ln w="12700">
             <a:solidFill>
-              <a:srgbClr val="DCEAE8"/>
+              <a:srgbClr val="DCEAED"/>
             </a:solidFill>
           </a:ln>
           <a:effectLst/>
@@ -17209,7 +17209,7 @@
             <a:r>
               <a:rPr sz="1100" b="1">
                 <a:solidFill>
-                  <a:srgbClr val="17302E"/>
+                  <a:srgbClr val="0E2830"/>
                 </a:solidFill>
                 <a:latin typeface="Outfit"/>
               </a:rPr>
@@ -17228,7 +17228,7 @@
             <a:r>
               <a:rPr sz="919" b="0">
                 <a:solidFill>
-                  <a:srgbClr val="5A7674"/>
+                  <a:srgbClr val="33555F"/>
                 </a:solidFill>
                 <a:latin typeface="Plus Jakarta Sans"/>
               </a:rPr>
@@ -17254,11 +17254,11 @@
             </a:avLst>
           </a:prstGeom>
           <a:solidFill>
-            <a:srgbClr val="F2F8F7"/>
+            <a:srgbClr val="F0F7F8"/>
           </a:solidFill>
           <a:ln w="12700">
             <a:solidFill>
-              <a:srgbClr val="DCEAE8"/>
+              <a:srgbClr val="DCEAED"/>
             </a:solidFill>
           </a:ln>
           <a:effectLst/>
@@ -17318,7 +17318,7 @@
             <a:r>
               <a:rPr sz="1100" b="1">
                 <a:solidFill>
-                  <a:srgbClr val="17302E"/>
+                  <a:srgbClr val="0E2830"/>
                 </a:solidFill>
                 <a:latin typeface="Outfit"/>
               </a:rPr>
@@ -17337,7 +17337,7 @@
             <a:r>
               <a:rPr sz="919" b="0">
                 <a:solidFill>
-                  <a:srgbClr val="5A7674"/>
+                  <a:srgbClr val="33555F"/>
                 </a:solidFill>
                 <a:latin typeface="Plus Jakarta Sans"/>
               </a:rPr>
@@ -17363,11 +17363,11 @@
             </a:avLst>
           </a:prstGeom>
           <a:solidFill>
-            <a:srgbClr val="F2F8F7"/>
+            <a:srgbClr val="F0F7F8"/>
           </a:solidFill>
           <a:ln w="12700">
             <a:solidFill>
-              <a:srgbClr val="DCEAE8"/>
+              <a:srgbClr val="DCEAED"/>
             </a:solidFill>
           </a:ln>
           <a:effectLst/>
@@ -17427,7 +17427,7 @@
             <a:r>
               <a:rPr sz="1100" b="1">
                 <a:solidFill>
-                  <a:srgbClr val="17302E"/>
+                  <a:srgbClr val="0E2830"/>
                 </a:solidFill>
                 <a:latin typeface="Outfit"/>
               </a:rPr>
@@ -17446,7 +17446,7 @@
             <a:r>
               <a:rPr sz="919" b="0">
                 <a:solidFill>
-                  <a:srgbClr val="5A7674"/>
+                  <a:srgbClr val="33555F"/>
                 </a:solidFill>
                 <a:latin typeface="Plus Jakarta Sans"/>
               </a:rPr>
@@ -17472,11 +17472,11 @@
             </a:avLst>
           </a:prstGeom>
           <a:solidFill>
-            <a:srgbClr val="E8823D"/>
+            <a:srgbClr val="FBF1D6"/>
           </a:solidFill>
           <a:ln w="12700">
             <a:solidFill>
-              <a:srgbClr val="E8823D"/>
+              <a:srgbClr val="D8AE55"/>
             </a:solidFill>
           </a:ln>
           <a:effectLst/>
@@ -17536,7 +17536,7 @@
             <a:r>
               <a:rPr sz="2400" b="1">
                 <a:solidFill>
-                  <a:srgbClr val="17302E"/>
+                  <a:srgbClr val="0E2830"/>
                 </a:solidFill>
                 <a:latin typeface="Outfit"/>
               </a:rPr>
@@ -17555,7 +17555,7 @@
             <a:r>
               <a:rPr sz="919" b="0">
                 <a:solidFill>
-                  <a:srgbClr val="17302E"/>
+                  <a:srgbClr val="33555F"/>
                 </a:solidFill>
                 <a:latin typeface="Plus Jakarta Sans"/>
               </a:rPr>
@@ -17581,11 +17581,11 @@
             </a:avLst>
           </a:prstGeom>
           <a:solidFill>
-            <a:srgbClr val="0A4B49"/>
+            <a:srgbClr val="0A5F65"/>
           </a:solidFill>
           <a:ln w="12700">
             <a:solidFill>
-              <a:srgbClr val="0A4B49"/>
+              <a:srgbClr val="0A5F65"/>
             </a:solidFill>
           </a:ln>
           <a:effectLst/>
@@ -17664,7 +17664,7 @@
             <a:r>
               <a:rPr sz="919" b="0">
                 <a:solidFill>
-                  <a:srgbClr val="D3E8E6"/>
+                  <a:srgbClr val="DCF2F3"/>
                 </a:solidFill>
                 <a:latin typeface="Plus Jakarta Sans"/>
               </a:rPr>
@@ -17706,7 +17706,7 @@
             <a:r>
               <a:rPr sz="700" b="0" cap="all" spc="140">
                 <a:solidFill>
-                  <a:srgbClr val="8FA6A4"/>
+                  <a:srgbClr val="52737D"/>
                 </a:solidFill>
                 <a:latin typeface="IBM Plex Mono"/>
               </a:rPr>
@@ -17748,7 +17748,7 @@
             <a:r>
               <a:rPr sz="900" b="0">
                 <a:solidFill>
-                  <a:srgbClr val="8FA6A4"/>
+                  <a:srgbClr val="52737D"/>
                 </a:solidFill>
                 <a:latin typeface="IBM Plex Mono"/>
               </a:rPr>
@@ -17790,7 +17790,7 @@
             <a:avLst/>
           </a:prstGeom>
           <a:solidFill>
-            <a:srgbClr val="FFFFFF"/>
+            <a:srgbClr val="FBFDFE"/>
           </a:solidFill>
           <a:ln>
             <a:noFill/>
@@ -17852,7 +17852,7 @@
             <a:r>
               <a:rPr sz="1000" b="0" cap="all" spc="240">
                 <a:solidFill>
-                  <a:srgbClr val="B55615"/>
+                  <a:srgbClr val="8A6608"/>
                 </a:solidFill>
                 <a:latin typeface="IBM Plex Mono"/>
               </a:rPr>
@@ -17894,7 +17894,7 @@
             <a:r>
               <a:rPr sz="3000" b="1">
                 <a:solidFill>
-                  <a:srgbClr val="17302E"/>
+                  <a:srgbClr val="0E2830"/>
                 </a:solidFill>
                 <a:latin typeface="Outfit"/>
               </a:rPr>
@@ -17920,11 +17920,11 @@
             </a:avLst>
           </a:prstGeom>
           <a:solidFill>
-            <a:srgbClr val="F2F8F7"/>
+            <a:srgbClr val="F0F7F8"/>
           </a:solidFill>
           <a:ln w="12700">
             <a:solidFill>
-              <a:srgbClr val="DCEAE8"/>
+              <a:srgbClr val="DCEAED"/>
             </a:solidFill>
           </a:ln>
           <a:effectLst/>
@@ -17984,7 +17984,7 @@
             <a:r>
               <a:rPr sz="1100" b="1">
                 <a:solidFill>
-                  <a:srgbClr val="17302E"/>
+                  <a:srgbClr val="0E2830"/>
                 </a:solidFill>
                 <a:latin typeface="Outfit"/>
               </a:rPr>
@@ -18003,7 +18003,7 @@
             <a:r>
               <a:rPr sz="919" b="0">
                 <a:solidFill>
-                  <a:srgbClr val="5A7674"/>
+                  <a:srgbClr val="33555F"/>
                 </a:solidFill>
                 <a:latin typeface="Plus Jakarta Sans"/>
               </a:rPr>
@@ -18029,11 +18029,11 @@
             </a:avLst>
           </a:prstGeom>
           <a:solidFill>
-            <a:srgbClr val="F2F8F7"/>
+            <a:srgbClr val="F0F7F8"/>
           </a:solidFill>
           <a:ln w="12700">
             <a:solidFill>
-              <a:srgbClr val="DCEAE8"/>
+              <a:srgbClr val="DCEAED"/>
             </a:solidFill>
           </a:ln>
           <a:effectLst/>
@@ -18093,7 +18093,7 @@
             <a:r>
               <a:rPr sz="1100" b="1">
                 <a:solidFill>
-                  <a:srgbClr val="17302E"/>
+                  <a:srgbClr val="0E2830"/>
                 </a:solidFill>
                 <a:latin typeface="Outfit"/>
               </a:rPr>
@@ -18112,7 +18112,7 @@
             <a:r>
               <a:rPr sz="919" b="0">
                 <a:solidFill>
-                  <a:srgbClr val="5A7674"/>
+                  <a:srgbClr val="33555F"/>
                 </a:solidFill>
                 <a:latin typeface="Plus Jakarta Sans"/>
               </a:rPr>
@@ -18138,11 +18138,11 @@
             </a:avLst>
           </a:prstGeom>
           <a:solidFill>
-            <a:srgbClr val="F2F8F7"/>
+            <a:srgbClr val="F0F7F8"/>
           </a:solidFill>
           <a:ln w="12700">
             <a:solidFill>
-              <a:srgbClr val="DCEAE8"/>
+              <a:srgbClr val="DCEAED"/>
             </a:solidFill>
           </a:ln>
           <a:effectLst/>
@@ -18202,7 +18202,7 @@
             <a:r>
               <a:rPr sz="1100" b="1">
                 <a:solidFill>
-                  <a:srgbClr val="17302E"/>
+                  <a:srgbClr val="0E2830"/>
                 </a:solidFill>
                 <a:latin typeface="Outfit"/>
               </a:rPr>
@@ -18221,7 +18221,7 @@
             <a:r>
               <a:rPr sz="919" b="0">
                 <a:solidFill>
-                  <a:srgbClr val="5A7674"/>
+                  <a:srgbClr val="33555F"/>
                 </a:solidFill>
                 <a:latin typeface="Plus Jakarta Sans"/>
               </a:rPr>
@@ -18247,11 +18247,11 @@
             </a:avLst>
           </a:prstGeom>
           <a:solidFill>
-            <a:srgbClr val="F2F8F7"/>
+            <a:srgbClr val="F0F7F8"/>
           </a:solidFill>
           <a:ln w="12700">
             <a:solidFill>
-              <a:srgbClr val="DCEAE8"/>
+              <a:srgbClr val="DCEAED"/>
             </a:solidFill>
           </a:ln>
           <a:effectLst/>
@@ -18311,7 +18311,7 @@
             <a:r>
               <a:rPr sz="1100" b="1">
                 <a:solidFill>
-                  <a:srgbClr val="17302E"/>
+                  <a:srgbClr val="0E2830"/>
                 </a:solidFill>
                 <a:latin typeface="Outfit"/>
               </a:rPr>
@@ -18330,7 +18330,7 @@
             <a:r>
               <a:rPr sz="919" b="0">
                 <a:solidFill>
-                  <a:srgbClr val="5A7674"/>
+                  <a:srgbClr val="33555F"/>
                 </a:solidFill>
                 <a:latin typeface="Plus Jakarta Sans"/>
               </a:rPr>
@@ -18356,11 +18356,11 @@
             </a:avLst>
           </a:prstGeom>
           <a:solidFill>
-            <a:srgbClr val="F2F8F7"/>
+            <a:srgbClr val="F0F7F8"/>
           </a:solidFill>
           <a:ln w="12700">
             <a:solidFill>
-              <a:srgbClr val="DCEAE8"/>
+              <a:srgbClr val="DCEAED"/>
             </a:solidFill>
           </a:ln>
           <a:effectLst/>
@@ -18420,7 +18420,7 @@
             <a:r>
               <a:rPr sz="1100" b="1">
                 <a:solidFill>
-                  <a:srgbClr val="17302E"/>
+                  <a:srgbClr val="0E2830"/>
                 </a:solidFill>
                 <a:latin typeface="Outfit"/>
               </a:rPr>
@@ -18439,7 +18439,7 @@
             <a:r>
               <a:rPr sz="919" b="0">
                 <a:solidFill>
-                  <a:srgbClr val="5A7674"/>
+                  <a:srgbClr val="33555F"/>
                 </a:solidFill>
                 <a:latin typeface="Plus Jakarta Sans"/>
               </a:rPr>
@@ -18465,11 +18465,11 @@
             </a:avLst>
           </a:prstGeom>
           <a:solidFill>
-            <a:srgbClr val="F2F8F7"/>
+            <a:srgbClr val="F0F7F8"/>
           </a:solidFill>
           <a:ln w="12700">
             <a:solidFill>
-              <a:srgbClr val="DCEAE8"/>
+              <a:srgbClr val="DCEAED"/>
             </a:solidFill>
           </a:ln>
           <a:effectLst/>
@@ -18529,7 +18529,7 @@
             <a:r>
               <a:rPr sz="1100" b="1">
                 <a:solidFill>
-                  <a:srgbClr val="17302E"/>
+                  <a:srgbClr val="0E2830"/>
                 </a:solidFill>
                 <a:latin typeface="Outfit"/>
               </a:rPr>
@@ -18548,7 +18548,7 @@
             <a:r>
               <a:rPr sz="919" b="0">
                 <a:solidFill>
-                  <a:srgbClr val="5A7674"/>
+                  <a:srgbClr val="33555F"/>
                 </a:solidFill>
                 <a:latin typeface="Plus Jakarta Sans"/>
               </a:rPr>
@@ -18574,11 +18574,11 @@
             </a:avLst>
           </a:prstGeom>
           <a:solidFill>
-            <a:srgbClr val="FBDCE6"/>
+            <a:srgbClr val="FCE2F0"/>
           </a:solidFill>
           <a:ln w="12700">
             <a:solidFill>
-              <a:srgbClr val="E85C82"/>
+              <a:srgbClr val="F49CCB"/>
             </a:solidFill>
           </a:ln>
           <a:effectLst/>
@@ -18638,7 +18638,7 @@
             <a:r>
               <a:rPr sz="1000" b="0">
                 <a:solidFill>
-                  <a:srgbClr val="17302E"/>
+                  <a:srgbClr val="0E2830"/>
                 </a:solidFill>
                 <a:latin typeface="Plus Jakarta Sans"/>
               </a:rPr>
@@ -18680,7 +18680,7 @@
             <a:r>
               <a:rPr sz="700" b="0" cap="all" spc="140">
                 <a:solidFill>
-                  <a:srgbClr val="8FA6A4"/>
+                  <a:srgbClr val="52737D"/>
                 </a:solidFill>
                 <a:latin typeface="IBM Plex Mono"/>
               </a:rPr>
@@ -18722,7 +18722,7 @@
             <a:r>
               <a:rPr sz="900" b="0">
                 <a:solidFill>
-                  <a:srgbClr val="8FA6A4"/>
+                  <a:srgbClr val="52737D"/>
                 </a:solidFill>
                 <a:latin typeface="IBM Plex Mono"/>
               </a:rPr>
@@ -18764,7 +18764,7 @@
             <a:avLst/>
           </a:prstGeom>
           <a:solidFill>
-            <a:srgbClr val="FFFFFF"/>
+            <a:srgbClr val="FBFDFE"/>
           </a:solidFill>
           <a:ln>
             <a:noFill/>
@@ -18826,7 +18826,7 @@
             <a:r>
               <a:rPr sz="1000" b="0" cap="all" spc="240">
                 <a:solidFill>
-                  <a:srgbClr val="B55615"/>
+                  <a:srgbClr val="8A6608"/>
                 </a:solidFill>
                 <a:latin typeface="IBM Plex Mono"/>
               </a:rPr>
@@ -18868,7 +18868,7 @@
             <a:r>
               <a:rPr sz="3000" b="1">
                 <a:solidFill>
-                  <a:srgbClr val="17302E"/>
+                  <a:srgbClr val="0E2830"/>
                 </a:solidFill>
                 <a:latin typeface="Outfit"/>
               </a:rPr>
@@ -18910,7 +18910,7 @@
             <a:r>
               <a:rPr sz="1200" b="0">
                 <a:solidFill>
-                  <a:srgbClr val="5A7674"/>
+                  <a:srgbClr val="52737D"/>
                 </a:solidFill>
                 <a:latin typeface="Plus Jakarta Sans"/>
               </a:rPr>
@@ -18936,11 +18936,11 @@
             </a:avLst>
           </a:prstGeom>
           <a:solidFill>
-            <a:srgbClr val="0A4B49"/>
+            <a:srgbClr val="0A5F65"/>
           </a:solidFill>
           <a:ln w="12700">
             <a:solidFill>
-              <a:srgbClr val="0A4B49"/>
+              <a:srgbClr val="0A5F65"/>
             </a:solidFill>
           </a:ln>
           <a:effectLst/>
@@ -19000,7 +19000,7 @@
             <a:r>
               <a:rPr sz="800" b="0" cap="all" spc="180">
                 <a:solidFill>
-                  <a:srgbClr val="9DC4C1"/>
+                  <a:srgbClr val="A9D6D9"/>
                 </a:solidFill>
                 <a:latin typeface="IBM Plex Mono"/>
               </a:rPr>
@@ -19038,7 +19038,7 @@
             <a:r>
               <a:rPr sz="900" b="0">
                 <a:solidFill>
-                  <a:srgbClr val="D3E8E6"/>
+                  <a:srgbClr val="DCF2F3"/>
                 </a:solidFill>
                 <a:latin typeface="Plus Jakarta Sans"/>
               </a:rPr>
@@ -19064,11 +19064,11 @@
             </a:avLst>
           </a:prstGeom>
           <a:solidFill>
-            <a:srgbClr val="13807C"/>
+            <a:srgbClr val="0C7A80"/>
           </a:solidFill>
           <a:ln w="12700">
             <a:solidFill>
-              <a:srgbClr val="13807C"/>
+              <a:srgbClr val="0C7A80"/>
             </a:solidFill>
           </a:ln>
           <a:effectLst/>
@@ -19192,11 +19192,11 @@
             </a:avLst>
           </a:prstGeom>
           <a:solidFill>
-            <a:srgbClr val="0A4B49"/>
+            <a:srgbClr val="0A5F65"/>
           </a:solidFill>
           <a:ln w="12700">
             <a:solidFill>
-              <a:srgbClr val="0A4B49"/>
+              <a:srgbClr val="0A5F65"/>
             </a:solidFill>
           </a:ln>
           <a:effectLst/>
@@ -19256,7 +19256,7 @@
             <a:r>
               <a:rPr sz="800" b="0" cap="all" spc="180">
                 <a:solidFill>
-                  <a:srgbClr val="9DC4C1"/>
+                  <a:srgbClr val="A9D6D9"/>
                 </a:solidFill>
                 <a:latin typeface="IBM Plex Mono"/>
               </a:rPr>
@@ -19294,7 +19294,7 @@
             <a:r>
               <a:rPr sz="900" b="0">
                 <a:solidFill>
-                  <a:srgbClr val="D3E8E6"/>
+                  <a:srgbClr val="DCF2F3"/>
                 </a:solidFill>
                 <a:latin typeface="Plus Jakarta Sans"/>
               </a:rPr>
@@ -19320,11 +19320,11 @@
             </a:avLst>
           </a:prstGeom>
           <a:solidFill>
-            <a:srgbClr val="13807C"/>
+            <a:srgbClr val="0C7A80"/>
           </a:solidFill>
           <a:ln w="12700">
             <a:solidFill>
-              <a:srgbClr val="13807C"/>
+              <a:srgbClr val="0C7A80"/>
             </a:solidFill>
           </a:ln>
           <a:effectLst/>
@@ -19464,7 +19464,7 @@
             <a:r>
               <a:rPr sz="700" b="0" cap="all" spc="140">
                 <a:solidFill>
-                  <a:srgbClr val="8FA6A4"/>
+                  <a:srgbClr val="52737D"/>
                 </a:solidFill>
                 <a:latin typeface="IBM Plex Mono"/>
               </a:rPr>
@@ -19506,7 +19506,7 @@
             <a:r>
               <a:rPr sz="900" b="0">
                 <a:solidFill>
-                  <a:srgbClr val="8FA6A4"/>
+                  <a:srgbClr val="52737D"/>
                 </a:solidFill>
                 <a:latin typeface="IBM Plex Mono"/>
               </a:rPr>
@@ -19548,7 +19548,7 @@
             <a:avLst/>
           </a:prstGeom>
           <a:solidFill>
-            <a:srgbClr val="FFFFFF"/>
+            <a:srgbClr val="FBFDFE"/>
           </a:solidFill>
           <a:ln>
             <a:noFill/>
@@ -19610,7 +19610,7 @@
             <a:r>
               <a:rPr sz="1000" b="0" cap="all" spc="240">
                 <a:solidFill>
-                  <a:srgbClr val="B55615"/>
+                  <a:srgbClr val="8A6608"/>
                 </a:solidFill>
                 <a:latin typeface="IBM Plex Mono"/>
               </a:rPr>
@@ -19652,7 +19652,7 @@
             <a:r>
               <a:rPr sz="2900" b="1">
                 <a:solidFill>
-                  <a:srgbClr val="17302E"/>
+                  <a:srgbClr val="0E2830"/>
                 </a:solidFill>
                 <a:latin typeface="Outfit"/>
               </a:rPr>
@@ -19694,7 +19694,7 @@
             <a:r>
               <a:rPr sz="800" b="0" cap="all" spc="180">
                 <a:solidFill>
-                  <a:srgbClr val="5D7573"/>
+                  <a:srgbClr val="52737D"/>
                 </a:solidFill>
                 <a:latin typeface="IBM Plex Mono"/>
               </a:rPr>
@@ -19718,7 +19718,7 @@
             <a:avLst/>
           </a:prstGeom>
           <a:solidFill>
-            <a:srgbClr val="0E6B68"/>
+            <a:srgbClr val="E9B949"/>
           </a:solidFill>
           <a:ln>
             <a:noFill/>
@@ -19780,7 +19780,7 @@
             <a:r>
               <a:rPr sz="980" b="0">
                 <a:solidFill>
-                  <a:srgbClr val="5A7674"/>
+                  <a:srgbClr val="33555F"/>
                 </a:solidFill>
                 <a:latin typeface="Plus Jakarta Sans"/>
               </a:rPr>
@@ -19804,7 +19804,7 @@
             <a:avLst/>
           </a:prstGeom>
           <a:solidFill>
-            <a:srgbClr val="0E6B68"/>
+            <a:srgbClr val="E9B949"/>
           </a:solidFill>
           <a:ln>
             <a:noFill/>
@@ -19866,7 +19866,7 @@
             <a:r>
               <a:rPr sz="980" b="0">
                 <a:solidFill>
-                  <a:srgbClr val="5A7674"/>
+                  <a:srgbClr val="33555F"/>
                 </a:solidFill>
                 <a:latin typeface="Plus Jakarta Sans"/>
               </a:rPr>
@@ -19890,7 +19890,7 @@
             <a:avLst/>
           </a:prstGeom>
           <a:solidFill>
-            <a:srgbClr val="0E6B68"/>
+            <a:srgbClr val="E9B949"/>
           </a:solidFill>
           <a:ln>
             <a:noFill/>
@@ -19952,7 +19952,7 @@
             <a:r>
               <a:rPr sz="980" b="0">
                 <a:solidFill>
-                  <a:srgbClr val="5A7674"/>
+                  <a:srgbClr val="33555F"/>
                 </a:solidFill>
                 <a:latin typeface="Plus Jakarta Sans"/>
               </a:rPr>
@@ -19976,7 +19976,7 @@
             <a:avLst/>
           </a:prstGeom>
           <a:solidFill>
-            <a:srgbClr val="0E6B68"/>
+            <a:srgbClr val="E9B949"/>
           </a:solidFill>
           <a:ln>
             <a:noFill/>
@@ -20038,7 +20038,7 @@
             <a:r>
               <a:rPr sz="980" b="0">
                 <a:solidFill>
-                  <a:srgbClr val="5A7674"/>
+                  <a:srgbClr val="33555F"/>
                 </a:solidFill>
                 <a:latin typeface="Plus Jakarta Sans"/>
               </a:rPr>
@@ -20064,11 +20064,11 @@
             </a:avLst>
           </a:prstGeom>
           <a:solidFill>
-            <a:srgbClr val="FBDCE6"/>
+            <a:srgbClr val="FCE2F0"/>
           </a:solidFill>
           <a:ln w="12700">
             <a:solidFill>
-              <a:srgbClr val="E85C82"/>
+              <a:srgbClr val="F49CCB"/>
             </a:solidFill>
           </a:ln>
           <a:effectLst/>
@@ -20128,7 +20128,7 @@
             <a:r>
               <a:rPr sz="800" b="0" cap="all" spc="180">
                 <a:solidFill>
-                  <a:srgbClr val="C11B48"/>
+                  <a:srgbClr val="C10073"/>
                 </a:solidFill>
                 <a:latin typeface="IBM Plex Mono"/>
               </a:rPr>
@@ -20147,7 +20147,7 @@
             <a:r>
               <a:rPr sz="1200" b="1">
                 <a:solidFill>
-                  <a:srgbClr val="17302E"/>
+                  <a:srgbClr val="0E2830"/>
                 </a:solidFill>
                 <a:latin typeface="Outfit"/>
               </a:rPr>
@@ -20166,7 +20166,7 @@
             <a:r>
               <a:rPr sz="950" b="1">
                 <a:solidFill>
-                  <a:srgbClr val="17302E"/>
+                  <a:srgbClr val="0E2830"/>
                 </a:solidFill>
                 <a:latin typeface="Plus Jakarta Sans"/>
               </a:rPr>
@@ -20185,7 +20185,7 @@
             <a:r>
               <a:rPr sz="950" b="0">
                 <a:solidFill>
-                  <a:srgbClr val="17302E"/>
+                  <a:srgbClr val="0E2830"/>
                 </a:solidFill>
                 <a:latin typeface="Plus Jakarta Sans"/>
               </a:rPr>
@@ -20204,7 +20204,7 @@
             <a:r>
               <a:rPr sz="950" b="0">
                 <a:solidFill>
-                  <a:srgbClr val="17302E"/>
+                  <a:srgbClr val="0E2830"/>
                 </a:solidFill>
                 <a:latin typeface="Plus Jakarta Sans"/>
               </a:rPr>
@@ -20246,7 +20246,7 @@
             <a:r>
               <a:rPr sz="700" b="0" cap="all" spc="140">
                 <a:solidFill>
-                  <a:srgbClr val="8FA6A4"/>
+                  <a:srgbClr val="52737D"/>
                 </a:solidFill>
                 <a:latin typeface="IBM Plex Mono"/>
               </a:rPr>
@@ -20288,7 +20288,7 @@
             <a:r>
               <a:rPr sz="900" b="0">
                 <a:solidFill>
-                  <a:srgbClr val="8FA6A4"/>
+                  <a:srgbClr val="52737D"/>
                 </a:solidFill>
                 <a:latin typeface="IBM Plex Mono"/>
               </a:rPr>
@@ -20330,7 +20330,7 @@
             <a:avLst/>
           </a:prstGeom>
           <a:solidFill>
-            <a:srgbClr val="FFFFFF"/>
+            <a:srgbClr val="FBFDFE"/>
           </a:solidFill>
           <a:ln>
             <a:noFill/>
@@ -20392,7 +20392,7 @@
             <a:r>
               <a:rPr sz="1000" b="0" cap="all" spc="240">
                 <a:solidFill>
-                  <a:srgbClr val="B55615"/>
+                  <a:srgbClr val="8A6608"/>
                 </a:solidFill>
                 <a:latin typeface="IBM Plex Mono"/>
               </a:rPr>
@@ -20434,7 +20434,7 @@
             <a:r>
               <a:rPr sz="2900" b="1">
                 <a:solidFill>
-                  <a:srgbClr val="17302E"/>
+                  <a:srgbClr val="0E2830"/>
                 </a:solidFill>
                 <a:latin typeface="Outfit"/>
               </a:rPr>
@@ -20476,7 +20476,7 @@
             <a:r>
               <a:rPr sz="1150" b="0">
                 <a:solidFill>
-                  <a:srgbClr val="5A7674"/>
+                  <a:srgbClr val="52737D"/>
                 </a:solidFill>
                 <a:latin typeface="Plus Jakarta Sans"/>
               </a:rPr>
@@ -20502,11 +20502,11 @@
             </a:avLst>
           </a:prstGeom>
           <a:solidFill>
-            <a:srgbClr val="F2F8F7"/>
+            <a:srgbClr val="F0F7F8"/>
           </a:solidFill>
           <a:ln w="12700">
             <a:solidFill>
-              <a:srgbClr val="DCEAE8"/>
+              <a:srgbClr val="DCEAED"/>
             </a:solidFill>
           </a:ln>
           <a:effectLst/>
@@ -20566,7 +20566,7 @@
             <a:r>
               <a:rPr sz="1150" b="1">
                 <a:solidFill>
-                  <a:srgbClr val="17302E"/>
+                  <a:srgbClr val="0E2830"/>
                 </a:solidFill>
                 <a:latin typeface="Outfit"/>
               </a:rPr>
@@ -20585,7 +20585,7 @@
             <a:r>
               <a:rPr sz="950" b="0">
                 <a:solidFill>
-                  <a:srgbClr val="5A7674"/>
+                  <a:srgbClr val="33555F"/>
                 </a:solidFill>
                 <a:latin typeface="Plus Jakarta Sans"/>
               </a:rPr>
@@ -20611,11 +20611,11 @@
             </a:avLst>
           </a:prstGeom>
           <a:solidFill>
-            <a:srgbClr val="F2F8F7"/>
+            <a:srgbClr val="F0F7F8"/>
           </a:solidFill>
           <a:ln w="12700">
             <a:solidFill>
-              <a:srgbClr val="DCEAE8"/>
+              <a:srgbClr val="DCEAED"/>
             </a:solidFill>
           </a:ln>
           <a:effectLst/>
@@ -20675,7 +20675,7 @@
             <a:r>
               <a:rPr sz="1150" b="1">
                 <a:solidFill>
-                  <a:srgbClr val="17302E"/>
+                  <a:srgbClr val="0E2830"/>
                 </a:solidFill>
                 <a:latin typeface="Outfit"/>
               </a:rPr>
@@ -20694,7 +20694,7 @@
             <a:r>
               <a:rPr sz="950" b="0">
                 <a:solidFill>
-                  <a:srgbClr val="5A7674"/>
+                  <a:srgbClr val="33555F"/>
                 </a:solidFill>
                 <a:latin typeface="Plus Jakarta Sans"/>
               </a:rPr>
@@ -20720,11 +20720,11 @@
             </a:avLst>
           </a:prstGeom>
           <a:solidFill>
-            <a:srgbClr val="F2F8F7"/>
+            <a:srgbClr val="F0F7F8"/>
           </a:solidFill>
           <a:ln w="12700">
             <a:solidFill>
-              <a:srgbClr val="DCEAE8"/>
+              <a:srgbClr val="DCEAED"/>
             </a:solidFill>
           </a:ln>
           <a:effectLst/>
@@ -20784,7 +20784,7 @@
             <a:r>
               <a:rPr sz="1150" b="1">
                 <a:solidFill>
-                  <a:srgbClr val="17302E"/>
+                  <a:srgbClr val="0E2830"/>
                 </a:solidFill>
                 <a:latin typeface="Outfit"/>
               </a:rPr>
@@ -20803,7 +20803,7 @@
             <a:r>
               <a:rPr sz="950" b="0">
                 <a:solidFill>
-                  <a:srgbClr val="5A7674"/>
+                  <a:srgbClr val="33555F"/>
                 </a:solidFill>
                 <a:latin typeface="Plus Jakarta Sans"/>
               </a:rPr>
@@ -20829,11 +20829,11 @@
             </a:avLst>
           </a:prstGeom>
           <a:solidFill>
-            <a:srgbClr val="F2F8F7"/>
+            <a:srgbClr val="F0F7F8"/>
           </a:solidFill>
           <a:ln w="12700">
             <a:solidFill>
-              <a:srgbClr val="DCEAE8"/>
+              <a:srgbClr val="DCEAED"/>
             </a:solidFill>
           </a:ln>
           <a:effectLst/>
@@ -20893,7 +20893,7 @@
             <a:r>
               <a:rPr sz="1150" b="1">
                 <a:solidFill>
-                  <a:srgbClr val="17302E"/>
+                  <a:srgbClr val="0E2830"/>
                 </a:solidFill>
                 <a:latin typeface="Outfit"/>
               </a:rPr>
@@ -20912,7 +20912,7 @@
             <a:r>
               <a:rPr sz="950" b="0">
                 <a:solidFill>
-                  <a:srgbClr val="5A7674"/>
+                  <a:srgbClr val="33555F"/>
                 </a:solidFill>
                 <a:latin typeface="Plus Jakarta Sans"/>
               </a:rPr>
@@ -20954,7 +20954,7 @@
             <a:r>
               <a:rPr sz="700" b="0" cap="all" spc="140">
                 <a:solidFill>
-                  <a:srgbClr val="8FA6A4"/>
+                  <a:srgbClr val="52737D"/>
                 </a:solidFill>
                 <a:latin typeface="IBM Plex Mono"/>
               </a:rPr>
@@ -20996,7 +20996,7 @@
             <a:r>
               <a:rPr sz="900" b="0">
                 <a:solidFill>
-                  <a:srgbClr val="8FA6A4"/>
+                  <a:srgbClr val="52737D"/>
                 </a:solidFill>
                 <a:latin typeface="IBM Plex Mono"/>
               </a:rPr>
